--- a/Plano_V02_iii_AM_FEG/e____Modelagem_MA_Resumo_RMG.pptx
+++ b/Plano_V02_iii_AM_FEG/e____Modelagem_MA_Resumo_RMG.pptx
@@ -8,8 +8,8 @@
     <p:sldId id="262" r:id="rId2"/>
     <p:sldId id="269" r:id="rId3"/>
     <p:sldId id="263" r:id="rId4"/>
-    <p:sldId id="270" r:id="rId5"/>
-    <p:sldId id="260" r:id="rId6"/>
+    <p:sldId id="260" r:id="rId5"/>
+    <p:sldId id="270" r:id="rId6"/>
     <p:sldId id="266" r:id="rId7"/>
     <p:sldId id="268" r:id="rId8"/>
     <p:sldId id="265" r:id="rId9"/>
@@ -272,7 +272,7 @@
           <a:p>
             <a:fld id="{C172F609-7128-42D8-8672-4D6F16D38DEE}" type="datetimeFigureOut">
               <a:rPr lang="LID4096" smtClean="0"/>
-              <a:t>10/03/2026</a:t>
+              <a:t>10/05/2026</a:t>
             </a:fld>
             <a:endParaRPr lang="LID4096"/>
           </a:p>
@@ -472,7 +472,7 @@
           <a:p>
             <a:fld id="{C172F609-7128-42D8-8672-4D6F16D38DEE}" type="datetimeFigureOut">
               <a:rPr lang="LID4096" smtClean="0"/>
-              <a:t>10/03/2026</a:t>
+              <a:t>10/05/2026</a:t>
             </a:fld>
             <a:endParaRPr lang="LID4096"/>
           </a:p>
@@ -682,7 +682,7 @@
           <a:p>
             <a:fld id="{C172F609-7128-42D8-8672-4D6F16D38DEE}" type="datetimeFigureOut">
               <a:rPr lang="LID4096" smtClean="0"/>
-              <a:t>10/03/2026</a:t>
+              <a:t>10/05/2026</a:t>
             </a:fld>
             <a:endParaRPr lang="LID4096"/>
           </a:p>
@@ -882,7 +882,7 @@
           <a:p>
             <a:fld id="{C172F609-7128-42D8-8672-4D6F16D38DEE}" type="datetimeFigureOut">
               <a:rPr lang="LID4096" smtClean="0"/>
-              <a:t>10/03/2026</a:t>
+              <a:t>10/05/2026</a:t>
             </a:fld>
             <a:endParaRPr lang="LID4096"/>
           </a:p>
@@ -1158,7 +1158,7 @@
           <a:p>
             <a:fld id="{C172F609-7128-42D8-8672-4D6F16D38DEE}" type="datetimeFigureOut">
               <a:rPr lang="LID4096" smtClean="0"/>
-              <a:t>10/03/2026</a:t>
+              <a:t>10/05/2026</a:t>
             </a:fld>
             <a:endParaRPr lang="LID4096"/>
           </a:p>
@@ -1426,7 +1426,7 @@
           <a:p>
             <a:fld id="{C172F609-7128-42D8-8672-4D6F16D38DEE}" type="datetimeFigureOut">
               <a:rPr lang="LID4096" smtClean="0"/>
-              <a:t>10/03/2026</a:t>
+              <a:t>10/05/2026</a:t>
             </a:fld>
             <a:endParaRPr lang="LID4096"/>
           </a:p>
@@ -1841,7 +1841,7 @@
           <a:p>
             <a:fld id="{C172F609-7128-42D8-8672-4D6F16D38DEE}" type="datetimeFigureOut">
               <a:rPr lang="LID4096" smtClean="0"/>
-              <a:t>10/03/2026</a:t>
+              <a:t>10/05/2026</a:t>
             </a:fld>
             <a:endParaRPr lang="LID4096"/>
           </a:p>
@@ -1983,7 +1983,7 @@
           <a:p>
             <a:fld id="{C172F609-7128-42D8-8672-4D6F16D38DEE}" type="datetimeFigureOut">
               <a:rPr lang="LID4096" smtClean="0"/>
-              <a:t>10/03/2026</a:t>
+              <a:t>10/05/2026</a:t>
             </a:fld>
             <a:endParaRPr lang="LID4096"/>
           </a:p>
@@ -2096,7 +2096,7 @@
           <a:p>
             <a:fld id="{C172F609-7128-42D8-8672-4D6F16D38DEE}" type="datetimeFigureOut">
               <a:rPr lang="LID4096" smtClean="0"/>
-              <a:t>10/03/2026</a:t>
+              <a:t>10/05/2026</a:t>
             </a:fld>
             <a:endParaRPr lang="LID4096"/>
           </a:p>
@@ -2409,7 +2409,7 @@
           <a:p>
             <a:fld id="{C172F609-7128-42D8-8672-4D6F16D38DEE}" type="datetimeFigureOut">
               <a:rPr lang="LID4096" smtClean="0"/>
-              <a:t>10/03/2026</a:t>
+              <a:t>10/05/2026</a:t>
             </a:fld>
             <a:endParaRPr lang="LID4096"/>
           </a:p>
@@ -2698,7 +2698,7 @@
           <a:p>
             <a:fld id="{C172F609-7128-42D8-8672-4D6F16D38DEE}" type="datetimeFigureOut">
               <a:rPr lang="LID4096" smtClean="0"/>
-              <a:t>10/03/2026</a:t>
+              <a:t>10/05/2026</a:t>
             </a:fld>
             <a:endParaRPr lang="LID4096"/>
           </a:p>
@@ -2941,7 +2941,7 @@
           <a:p>
             <a:fld id="{C172F609-7128-42D8-8672-4D6F16D38DEE}" type="datetimeFigureOut">
               <a:rPr lang="LID4096" smtClean="0"/>
-              <a:t>10/03/2026</a:t>
+              <a:t>10/05/2026</a:t>
             </a:fld>
             <a:endParaRPr lang="LID4096"/>
           </a:p>
@@ -3358,87 +3358,6 @@
           <a:chExt cx="0" cy="0"/>
         </a:xfrm>
       </p:grpSpPr>
-      <p:sp>
-        <p:nvSpPr>
-          <p:cNvPr id="13" name="Rectangle: Rounded Corners 12">
-            <a:extLst>
-              <a:ext uri="{FF2B5EF4-FFF2-40B4-BE49-F238E27FC236}">
-                <a16:creationId xmlns:a16="http://schemas.microsoft.com/office/drawing/2014/main" id="{FE3E1127-CDBC-9B5D-F163-A0E5978E1E96}"/>
-              </a:ext>
-            </a:extLst>
-          </p:cNvPr>
-          <p:cNvSpPr/>
-          <p:nvPr/>
-        </p:nvSpPr>
-        <p:spPr>
-          <a:xfrm>
-            <a:off x="675701" y="201481"/>
-            <a:ext cx="4831455" cy="318411"/>
-          </a:xfrm>
-          <a:prstGeom prst="roundRect">
-            <a:avLst/>
-          </a:prstGeom>
-          <a:solidFill>
-            <a:schemeClr val="bg1"/>
-          </a:solidFill>
-        </p:spPr>
-        <p:txBody>
-          <a:bodyPr wrap="square" lIns="0" tIns="0" rIns="0" bIns="0" anchor="ctr" anchorCtr="0">
-            <a:noAutofit/>
-          </a:bodyPr>
-          <a:lstStyle/>
-          <a:p>
-            <a:r>
-              <a:rPr lang="LID4096" sz="2400" b="1" dirty="0">
-                <a:solidFill>
-                  <a:srgbClr val="0000FF"/>
-                </a:solidFill>
-                <a:effectLst>
-                  <a:outerShdw blurRad="38100" dist="38100" dir="2700000" algn="tl">
-                    <a:srgbClr val="000000">
-                      <a:alpha val="43137"/>
-                    </a:srgbClr>
-                  </a:outerShdw>
-                </a:effectLst>
-                <a:latin typeface="Horley Old Style MT"/>
-              </a:rPr>
-              <a:t>Powder</a:t>
-            </a:r>
-            <a:r>
-              <a:rPr lang="pt-BR" sz="2400" b="1" dirty="0">
-                <a:solidFill>
-                  <a:srgbClr val="0000FF"/>
-                </a:solidFill>
-                <a:effectLst>
-                  <a:outerShdw blurRad="38100" dist="38100" dir="2700000" algn="tl">
-                    <a:srgbClr val="000000">
-                      <a:alpha val="43137"/>
-                    </a:srgbClr>
-                  </a:outerShdw>
-                </a:effectLst>
-                <a:latin typeface="Horley Old Style MT"/>
-              </a:rPr>
-              <a:t> </a:t>
-            </a:r>
-            <a:r>
-              <a:rPr lang="LID4096" sz="2400" b="1" dirty="0">
-                <a:solidFill>
-                  <a:srgbClr val="0000FF"/>
-                </a:solidFill>
-                <a:effectLst>
-                  <a:outerShdw blurRad="38100" dist="38100" dir="2700000" algn="tl">
-                    <a:srgbClr val="000000">
-                      <a:alpha val="43137"/>
-                    </a:srgbClr>
-                  </a:outerShdw>
-                </a:effectLst>
-                <a:latin typeface="Horley Old Style MT"/>
-              </a:rPr>
-              <a:t>Bed Fusion (PBF)</a:t>
-            </a:r>
-          </a:p>
-        </p:txBody>
-      </p:sp>
       <p:cxnSp>
         <p:nvCxnSpPr>
           <p:cNvPr id="2" name="Straight Connector 1">
@@ -3646,7 +3565,7 @@
         </p:blipFill>
         <p:spPr>
           <a:xfrm>
-            <a:off x="358842" y="697116"/>
+            <a:off x="585177" y="697116"/>
             <a:ext cx="4704696" cy="3069125"/>
           </a:xfrm>
           <a:prstGeom prst="rect">
@@ -3689,7 +3608,7 @@
         </p:blipFill>
         <p:spPr>
           <a:xfrm>
-            <a:off x="481518" y="3905993"/>
+            <a:off x="707853" y="3905993"/>
             <a:ext cx="4332584" cy="2750526"/>
           </a:xfrm>
           <a:prstGeom prst="rect">
@@ -3697,6 +3616,85 @@
           </a:prstGeom>
         </p:spPr>
       </p:pic>
+      <p:sp>
+        <p:nvSpPr>
+          <p:cNvPr id="3" name="Rectangle: Rounded Corners 2">
+            <a:extLst>
+              <a:ext uri="{FF2B5EF4-FFF2-40B4-BE49-F238E27FC236}">
+                <a16:creationId xmlns:a16="http://schemas.microsoft.com/office/drawing/2014/main" id="{6F794F47-B59C-8DC5-E51E-9257C60CD17A}"/>
+              </a:ext>
+            </a:extLst>
+          </p:cNvPr>
+          <p:cNvSpPr/>
+          <p:nvPr/>
+        </p:nvSpPr>
+        <p:spPr>
+          <a:xfrm>
+            <a:off x="784340" y="201481"/>
+            <a:ext cx="3380256" cy="318411"/>
+          </a:xfrm>
+          <a:prstGeom prst="roundRect">
+            <a:avLst/>
+          </a:prstGeom>
+          <a:noFill/>
+        </p:spPr>
+        <p:txBody>
+          <a:bodyPr wrap="square" lIns="0" tIns="0" rIns="0" bIns="0" anchor="ctr" anchorCtr="0">
+            <a:noAutofit/>
+          </a:bodyPr>
+          <a:lstStyle/>
+          <a:p>
+            <a:r>
+              <a:rPr lang="LID4096" sz="2400" b="1" u="sng" dirty="0">
+                <a:solidFill>
+                  <a:srgbClr val="0000FF"/>
+                </a:solidFill>
+                <a:effectLst>
+                  <a:outerShdw blurRad="38100" dist="38100" dir="2700000" algn="tl">
+                    <a:srgbClr val="000000">
+                      <a:alpha val="43137"/>
+                    </a:srgbClr>
+                  </a:outerShdw>
+                </a:effectLst>
+                <a:latin typeface="Horley Old Style MT"/>
+              </a:rPr>
+              <a:t>Powder</a:t>
+            </a:r>
+            <a:r>
+              <a:rPr lang="pt-BR" sz="2400" b="1" dirty="0">
+                <a:solidFill>
+                  <a:srgbClr val="0000FF"/>
+                </a:solidFill>
+                <a:effectLst>
+                  <a:outerShdw blurRad="38100" dist="38100" dir="2700000" algn="tl">
+                    <a:srgbClr val="000000">
+                      <a:alpha val="43137"/>
+                    </a:srgbClr>
+                  </a:outerShdw>
+                </a:effectLst>
+                <a:latin typeface="Horley Old Style MT"/>
+              </a:rPr>
+              <a:t> </a:t>
+            </a:r>
+            <a:r>
+              <a:rPr lang="LID4096" sz="2400" b="1" dirty="0">
+                <a:solidFill>
+                  <a:srgbClr val="0000FF"/>
+                </a:solidFill>
+                <a:effectLst>
+                  <a:outerShdw blurRad="38100" dist="38100" dir="2700000" algn="tl">
+                    <a:srgbClr val="000000">
+                      <a:alpha val="43137"/>
+                    </a:srgbClr>
+                  </a:outerShdw>
+                </a:effectLst>
+                <a:latin typeface="Horley Old Style MT"/>
+              </a:rPr>
+              <a:t>Bed Fusion (PBF)</a:t>
+            </a:r>
+          </a:p>
+        </p:txBody>
+      </p:sp>
     </p:spTree>
     <p:extLst>
       <p:ext uri="{BB962C8B-B14F-4D97-AF65-F5344CB8AC3E}">
@@ -6264,8 +6262,8 @@
         </p:nvSpPr>
         <p:spPr>
           <a:xfrm>
-            <a:off x="675701" y="201481"/>
-            <a:ext cx="4831455" cy="318411"/>
+            <a:off x="2955489" y="658496"/>
+            <a:ext cx="980423" cy="318411"/>
           </a:xfrm>
           <a:prstGeom prst="roundRect">
             <a:avLst/>
@@ -6280,70 +6278,7 @@
           </a:bodyPr>
           <a:lstStyle/>
           <a:p>
-            <a:r>
-              <a:rPr lang="LID4096" sz="2400" b="1" dirty="0">
-                <a:solidFill>
-                  <a:srgbClr val="0000FF"/>
-                </a:solidFill>
-                <a:effectLst>
-                  <a:outerShdw blurRad="38100" dist="38100" dir="2700000" algn="tl">
-                    <a:srgbClr val="000000">
-                      <a:alpha val="43137"/>
-                    </a:srgbClr>
-                  </a:outerShdw>
-                </a:effectLst>
-                <a:latin typeface="Horley Old Style MT"/>
-              </a:rPr>
-              <a:t>Powder</a:t>
-            </a:r>
-            <a:r>
-              <a:rPr lang="pt-BR" sz="2400" b="1" dirty="0">
-                <a:solidFill>
-                  <a:srgbClr val="0000FF"/>
-                </a:solidFill>
-                <a:effectLst>
-                  <a:outerShdw blurRad="38100" dist="38100" dir="2700000" algn="tl">
-                    <a:srgbClr val="000000">
-                      <a:alpha val="43137"/>
-                    </a:srgbClr>
-                  </a:outerShdw>
-                </a:effectLst>
-                <a:latin typeface="Horley Old Style MT"/>
-              </a:rPr>
-              <a:t> </a:t>
-            </a:r>
-            <a:r>
-              <a:rPr lang="LID4096" sz="2400" b="1" dirty="0">
-                <a:solidFill>
-                  <a:srgbClr val="0000FF"/>
-                </a:solidFill>
-                <a:effectLst>
-                  <a:outerShdw blurRad="38100" dist="38100" dir="2700000" algn="tl">
-                    <a:srgbClr val="000000">
-                      <a:alpha val="43137"/>
-                    </a:srgbClr>
-                  </a:outerShdw>
-                </a:effectLst>
-                <a:latin typeface="Horley Old Style MT"/>
-              </a:rPr>
-              <a:t>Bed Fusion (PBF)</a:t>
-            </a:r>
-            <a:r>
-              <a:rPr lang="pt-BR" sz="2400" b="1" dirty="0">
-                <a:solidFill>
-                  <a:srgbClr val="0000FF"/>
-                </a:solidFill>
-                <a:effectLst>
-                  <a:outerShdw blurRad="38100" dist="38100" dir="2700000" algn="tl">
-                    <a:srgbClr val="000000">
-                      <a:alpha val="43137"/>
-                    </a:srgbClr>
-                  </a:outerShdw>
-                </a:effectLst>
-                <a:latin typeface="Horley Old Style MT"/>
-              </a:rPr>
-              <a:t>    </a:t>
-            </a:r>
+            <a:pPr algn="r"/>
             <a:r>
               <a:rPr lang="pt-BR" sz="2400" b="1" dirty="0">
                 <a:effectLst>
@@ -6436,7 +6371,7 @@
         </p:nvSpPr>
         <p:spPr>
           <a:xfrm>
-            <a:off x="596436" y="1977601"/>
+            <a:off x="596436" y="2095294"/>
             <a:ext cx="5131267" cy="1569660"/>
           </a:xfrm>
           <a:prstGeom prst="rect">
@@ -6525,8 +6460,8 @@
         </p:nvSpPr>
         <p:spPr>
           <a:xfrm>
-            <a:off x="596436" y="4461293"/>
-            <a:ext cx="3124391" cy="1015663"/>
+            <a:off x="596436" y="4225905"/>
+            <a:ext cx="3124391" cy="1646605"/>
           </a:xfrm>
           <a:prstGeom prst="rect">
             <a:avLst/>
@@ -6540,9 +6475,28 @@
           <a:lstStyle/>
           <a:p>
             <a:r>
-              <a:rPr lang="pt-BR" sz="2000" b="1" noProof="0" dirty="0"/>
+              <a:rPr lang="pt-BR" sz="2800" b="1" u="sng" noProof="0" dirty="0">
+                <a:effectLst>
+                  <a:outerShdw blurRad="38100" dist="38100" dir="2700000" algn="tl">
+                    <a:srgbClr val="000000">
+                      <a:alpha val="43137"/>
+                    </a:srgbClr>
+                  </a:outerShdw>
+                </a:effectLst>
+              </a:rPr>
               <a:t>Classificações:</a:t>
             </a:r>
+          </a:p>
+          <a:p>
+            <a:endParaRPr lang="pt-BR" sz="1600" b="1" u="sng" noProof="0" dirty="0">
+              <a:effectLst>
+                <a:outerShdw blurRad="38100" dist="38100" dir="2700000" algn="tl">
+                  <a:srgbClr val="000000">
+                    <a:alpha val="43137"/>
+                  </a:srgbClr>
+                </a:outerShdw>
+              </a:effectLst>
+            </a:endParaRPr>
           </a:p>
           <a:p>
             <a:pPr marL="342900" indent="-342900">
@@ -6550,7 +6504,7 @@
               <a:buChar char="-"/>
             </a:pPr>
             <a:r>
-              <a:rPr lang="pt-BR" sz="2000" b="1" dirty="0"/>
+              <a:rPr lang="pt-BR" sz="2400" dirty="0"/>
               <a:t>Fonte de energia</a:t>
             </a:r>
           </a:p>
@@ -6559,11 +6513,17 @@
               <a:buFontTx/>
               <a:buChar char="-"/>
             </a:pPr>
-            <a:r>
-              <a:rPr lang="pt-BR" sz="2000" b="1" noProof="0" dirty="0"/>
+            <a:endParaRPr lang="pt-BR" sz="900" dirty="0"/>
+          </a:p>
+          <a:p>
+            <a:pPr marL="342900" indent="-342900">
+              <a:buFontTx/>
+              <a:buChar char="-"/>
+            </a:pPr>
+            <a:r>
+              <a:rPr lang="pt-BR" sz="2400" noProof="0" dirty="0"/>
               <a:t>Tipo de material</a:t>
             </a:r>
-            <a:endParaRPr lang="pt-BR" sz="2000" noProof="0" dirty="0"/>
           </a:p>
         </p:txBody>
       </p:sp>
@@ -6661,6 +6621,85 @@
           </a:fontRef>
         </p:style>
       </p:cxnSp>
+      <p:sp>
+        <p:nvSpPr>
+          <p:cNvPr id="3" name="Rectangle: Rounded Corners 2">
+            <a:extLst>
+              <a:ext uri="{FF2B5EF4-FFF2-40B4-BE49-F238E27FC236}">
+                <a16:creationId xmlns:a16="http://schemas.microsoft.com/office/drawing/2014/main" id="{576B5466-651A-4813-52DC-98E73BD34022}"/>
+              </a:ext>
+            </a:extLst>
+          </p:cNvPr>
+          <p:cNvSpPr/>
+          <p:nvPr/>
+        </p:nvSpPr>
+        <p:spPr>
+          <a:xfrm>
+            <a:off x="784340" y="201481"/>
+            <a:ext cx="3380256" cy="318411"/>
+          </a:xfrm>
+          <a:prstGeom prst="roundRect">
+            <a:avLst/>
+          </a:prstGeom>
+          <a:noFill/>
+        </p:spPr>
+        <p:txBody>
+          <a:bodyPr wrap="square" lIns="0" tIns="0" rIns="0" bIns="0" anchor="ctr" anchorCtr="0">
+            <a:noAutofit/>
+          </a:bodyPr>
+          <a:lstStyle/>
+          <a:p>
+            <a:r>
+              <a:rPr lang="LID4096" sz="2400" b="1" dirty="0">
+                <a:solidFill>
+                  <a:srgbClr val="0000FF"/>
+                </a:solidFill>
+                <a:effectLst>
+                  <a:outerShdw blurRad="38100" dist="38100" dir="2700000" algn="tl">
+                    <a:srgbClr val="000000">
+                      <a:alpha val="43137"/>
+                    </a:srgbClr>
+                  </a:outerShdw>
+                </a:effectLst>
+                <a:latin typeface="Horley Old Style MT"/>
+              </a:rPr>
+              <a:t>Powder</a:t>
+            </a:r>
+            <a:r>
+              <a:rPr lang="pt-BR" sz="2400" b="1" dirty="0">
+                <a:solidFill>
+                  <a:srgbClr val="0000FF"/>
+                </a:solidFill>
+                <a:effectLst>
+                  <a:outerShdw blurRad="38100" dist="38100" dir="2700000" algn="tl">
+                    <a:srgbClr val="000000">
+                      <a:alpha val="43137"/>
+                    </a:srgbClr>
+                  </a:outerShdw>
+                </a:effectLst>
+                <a:latin typeface="Horley Old Style MT"/>
+              </a:rPr>
+              <a:t> </a:t>
+            </a:r>
+            <a:r>
+              <a:rPr lang="LID4096" sz="2400" b="1" dirty="0">
+                <a:solidFill>
+                  <a:srgbClr val="0000FF"/>
+                </a:solidFill>
+                <a:effectLst>
+                  <a:outerShdw blurRad="38100" dist="38100" dir="2700000" algn="tl">
+                    <a:srgbClr val="000000">
+                      <a:alpha val="43137"/>
+                    </a:srgbClr>
+                  </a:outerShdw>
+                </a:effectLst>
+                <a:latin typeface="Horley Old Style MT"/>
+              </a:rPr>
+              <a:t>Bed Fusion (PBF)</a:t>
+            </a:r>
+          </a:p>
+        </p:txBody>
+      </p:sp>
     </p:spTree>
     <p:extLst>
       <p:ext uri="{BB962C8B-B14F-4D97-AF65-F5344CB8AC3E}">
@@ -6933,7 +6972,7 @@
               <a:buChar char="-"/>
             </a:pPr>
             <a:r>
-              <a:rPr lang="pt-BR" sz="3200" noProof="0" dirty="0">
+              <a:rPr lang="pt-BR" sz="3200" b="1" noProof="0" dirty="0">
                 <a:solidFill>
                   <a:srgbClr val="0000FF"/>
                 </a:solidFill>
@@ -7158,884 +7197,6 @@
 </file>
 
 <file path=ppt/slides/slide4.xml><?xml version="1.0" encoding="utf-8"?>
-<p:sld xmlns:a="http://schemas.openxmlformats.org/drawingml/2006/main" xmlns:r="http://schemas.openxmlformats.org/officeDocument/2006/relationships" xmlns:p="http://schemas.openxmlformats.org/presentationml/2006/main">
-  <p:cSld>
-    <p:spTree>
-      <p:nvGrpSpPr>
-        <p:cNvPr id="1" name="">
-          <a:extLst>
-            <a:ext uri="{FF2B5EF4-FFF2-40B4-BE49-F238E27FC236}">
-              <a16:creationId xmlns:a16="http://schemas.microsoft.com/office/drawing/2014/main" id="{62B4FED2-8C2D-CBC5-EC1D-3E567474348F}"/>
-            </a:ext>
-          </a:extLst>
-        </p:cNvPr>
-        <p:cNvGrpSpPr/>
-        <p:nvPr/>
-      </p:nvGrpSpPr>
-      <p:grpSpPr>
-        <a:xfrm>
-          <a:off x="0" y="0"/>
-          <a:ext cx="0" cy="0"/>
-          <a:chOff x="0" y="0"/>
-          <a:chExt cx="0" cy="0"/>
-        </a:xfrm>
-      </p:grpSpPr>
-      <p:grpSp>
-        <p:nvGrpSpPr>
-          <p:cNvPr id="8" name="Group 7">
-            <a:extLst>
-              <a:ext uri="{FF2B5EF4-FFF2-40B4-BE49-F238E27FC236}">
-                <a16:creationId xmlns:a16="http://schemas.microsoft.com/office/drawing/2014/main" id="{1931FF7F-D890-000A-DBE8-01F406BEC642}"/>
-              </a:ext>
-            </a:extLst>
-          </p:cNvPr>
-          <p:cNvGrpSpPr>
-            <a:grpSpLocks noChangeAspect="1"/>
-          </p:cNvGrpSpPr>
-          <p:nvPr/>
-        </p:nvGrpSpPr>
-        <p:grpSpPr>
-          <a:xfrm>
-            <a:off x="699788" y="2240676"/>
-            <a:ext cx="10792424" cy="2244475"/>
-            <a:chOff x="1022745" y="1409461"/>
-            <a:chExt cx="10669753" cy="2285845"/>
-          </a:xfrm>
-        </p:grpSpPr>
-        <p:pic>
-          <p:nvPicPr>
-            <p:cNvPr id="5" name="Picture 4">
-              <a:extLst>
-                <a:ext uri="{FF2B5EF4-FFF2-40B4-BE49-F238E27FC236}">
-                  <a16:creationId xmlns:a16="http://schemas.microsoft.com/office/drawing/2014/main" id="{C5A93156-15E9-6FCC-08A2-D16608D8EBEF}"/>
-                </a:ext>
-              </a:extLst>
-            </p:cNvPr>
-            <p:cNvPicPr>
-              <a:picLocks noChangeAspect="1"/>
-            </p:cNvPicPr>
-            <p:nvPr/>
-          </p:nvPicPr>
-          <p:blipFill>
-            <a:blip r:embed="rId2"/>
-            <a:srcRect t="17529" b="51086"/>
-            <a:stretch>
-              <a:fillRect/>
-            </a:stretch>
-          </p:blipFill>
-          <p:spPr>
-            <a:xfrm>
-              <a:off x="1022745" y="1409461"/>
-              <a:ext cx="10669753" cy="2210431"/>
-            </a:xfrm>
-            <a:prstGeom prst="rect">
-              <a:avLst/>
-            </a:prstGeom>
-          </p:spPr>
-        </p:pic>
-        <p:sp>
-          <p:nvSpPr>
-            <p:cNvPr id="7" name="Rectangle 6">
-              <a:extLst>
-                <a:ext uri="{FF2B5EF4-FFF2-40B4-BE49-F238E27FC236}">
-                  <a16:creationId xmlns:a16="http://schemas.microsoft.com/office/drawing/2014/main" id="{7700BA0A-1C05-83BB-E2E6-874CF37D9164}"/>
-                </a:ext>
-              </a:extLst>
-            </p:cNvPr>
-            <p:cNvSpPr/>
-            <p:nvPr/>
-          </p:nvSpPr>
-          <p:spPr>
-            <a:xfrm>
-              <a:off x="4694548" y="3381865"/>
-              <a:ext cx="3073139" cy="313441"/>
-            </a:xfrm>
-            <a:prstGeom prst="rect">
-              <a:avLst/>
-            </a:prstGeom>
-            <a:solidFill>
-              <a:schemeClr val="bg1"/>
-            </a:solidFill>
-            <a:ln>
-              <a:solidFill>
-                <a:schemeClr val="bg1"/>
-              </a:solidFill>
-            </a:ln>
-          </p:spPr>
-          <p:style>
-            <a:lnRef idx="2">
-              <a:schemeClr val="accent1">
-                <a:shade val="15000"/>
-              </a:schemeClr>
-            </a:lnRef>
-            <a:fillRef idx="1">
-              <a:schemeClr val="accent1"/>
-            </a:fillRef>
-            <a:effectRef idx="0">
-              <a:schemeClr val="accent1"/>
-            </a:effectRef>
-            <a:fontRef idx="minor">
-              <a:schemeClr val="lt1"/>
-            </a:fontRef>
-          </p:style>
-          <p:txBody>
-            <a:bodyPr rtlCol="0" anchor="ctr"/>
-            <a:lstStyle/>
-            <a:p>
-              <a:pPr algn="ctr"/>
-              <a:endParaRPr lang="LID4096" dirty="0"/>
-            </a:p>
-          </p:txBody>
-        </p:sp>
-      </p:grpSp>
-      <p:sp>
-        <p:nvSpPr>
-          <p:cNvPr id="21" name="TextBox 20">
-            <a:extLst>
-              <a:ext uri="{FF2B5EF4-FFF2-40B4-BE49-F238E27FC236}">
-                <a16:creationId xmlns:a16="http://schemas.microsoft.com/office/drawing/2014/main" id="{1579ACB3-1D08-3FBB-935E-915DB5103E55}"/>
-              </a:ext>
-            </a:extLst>
-          </p:cNvPr>
-          <p:cNvSpPr txBox="1"/>
-          <p:nvPr/>
-        </p:nvSpPr>
-        <p:spPr>
-          <a:xfrm>
-            <a:off x="532889" y="908670"/>
-            <a:ext cx="3409386" cy="1015663"/>
-          </a:xfrm>
-          <a:prstGeom prst="rect">
-            <a:avLst/>
-          </a:prstGeom>
-          <a:noFill/>
-        </p:spPr>
-        <p:txBody>
-          <a:bodyPr wrap="square">
-            <a:spAutoFit/>
-          </a:bodyPr>
-          <a:lstStyle/>
-          <a:p>
-            <a:pPr algn="just"/>
-            <a:r>
-              <a:rPr lang="en-GB" sz="2400" b="1" i="0" u="sng" strike="noStrike" baseline="0" dirty="0">
-                <a:solidFill>
-                  <a:srgbClr val="FF0000"/>
-                </a:solidFill>
-                <a:latin typeface="Times New Roman" panose="02020603050405020304" pitchFamily="18" charset="0"/>
-              </a:rPr>
-              <a:t>Macro-scale</a:t>
-            </a:r>
-            <a:r>
-              <a:rPr lang="en-GB" sz="1800" b="1" i="0" u="sng" strike="noStrike" baseline="0" dirty="0">
-                <a:solidFill>
-                  <a:srgbClr val="000000"/>
-                </a:solidFill>
-                <a:latin typeface="Times New Roman" panose="02020603050405020304" pitchFamily="18" charset="0"/>
-              </a:rPr>
-              <a:t> models</a:t>
-            </a:r>
-            <a:r>
-              <a:rPr lang="en-GB" sz="1800" b="0" i="0" u="none" strike="noStrike" baseline="0" dirty="0">
-                <a:solidFill>
-                  <a:srgbClr val="000000"/>
-                </a:solidFill>
-                <a:latin typeface="Times New Roman" panose="02020603050405020304" pitchFamily="18" charset="0"/>
-              </a:rPr>
-              <a:t> </a:t>
-            </a:r>
-          </a:p>
-          <a:p>
-            <a:r>
-              <a:rPr lang="en-GB" sz="1800" b="0" i="0" u="none" strike="noStrike" baseline="0" dirty="0">
-                <a:solidFill>
-                  <a:srgbClr val="000000"/>
-                </a:solidFill>
-                <a:latin typeface="Times New Roman" panose="02020603050405020304" pitchFamily="18" charset="0"/>
-              </a:rPr>
-              <a:t>heat flow and structural (stress) deformation &amp; </a:t>
-            </a:r>
-            <a:r>
-              <a:rPr lang="en-GB" dirty="0">
-                <a:solidFill>
-                  <a:srgbClr val="000000"/>
-                </a:solidFill>
-                <a:latin typeface="Times New Roman" panose="02020603050405020304" pitchFamily="18" charset="0"/>
-              </a:rPr>
-              <a:t>interlayer bonding,</a:t>
-            </a:r>
-            <a:endParaRPr lang="LID4096" dirty="0"/>
-          </a:p>
-        </p:txBody>
-      </p:sp>
-      <p:sp>
-        <p:nvSpPr>
-          <p:cNvPr id="28" name="TextBox 27">
-            <a:extLst>
-              <a:ext uri="{FF2B5EF4-FFF2-40B4-BE49-F238E27FC236}">
-                <a16:creationId xmlns:a16="http://schemas.microsoft.com/office/drawing/2014/main" id="{54690474-BDEF-D3E4-E001-BF8A037259C1}"/>
-              </a:ext>
-            </a:extLst>
-          </p:cNvPr>
-          <p:cNvSpPr txBox="1"/>
-          <p:nvPr/>
-        </p:nvSpPr>
-        <p:spPr>
-          <a:xfrm>
-            <a:off x="322120" y="108030"/>
-            <a:ext cx="6094428" cy="523220"/>
-          </a:xfrm>
-          <a:prstGeom prst="rect">
-            <a:avLst/>
-          </a:prstGeom>
-          <a:noFill/>
-        </p:spPr>
-        <p:txBody>
-          <a:bodyPr wrap="square">
-            <a:spAutoFit/>
-          </a:bodyPr>
-          <a:lstStyle/>
-          <a:p>
-            <a:r>
-              <a:rPr lang="pt-BR" sz="2800" b="1" dirty="0">
-                <a:effectLst>
-                  <a:outerShdw blurRad="38100" dist="38100" dir="2700000" algn="tl">
-                    <a:srgbClr val="000000">
-                      <a:alpha val="43137"/>
-                    </a:srgbClr>
-                  </a:outerShdw>
-                </a:effectLst>
-              </a:rPr>
-              <a:t>MODELAGEM</a:t>
-            </a:r>
-            <a:endParaRPr lang="LID4096" sz="2000" dirty="0"/>
-          </a:p>
-        </p:txBody>
-      </p:sp>
-      <p:sp>
-        <p:nvSpPr>
-          <p:cNvPr id="3" name="TextBox 2">
-            <a:extLst>
-              <a:ext uri="{FF2B5EF4-FFF2-40B4-BE49-F238E27FC236}">
-                <a16:creationId xmlns:a16="http://schemas.microsoft.com/office/drawing/2014/main" id="{7A9585BF-3078-B5E5-DCD6-6FC3D4B4C024}"/>
-              </a:ext>
-            </a:extLst>
-          </p:cNvPr>
-          <p:cNvSpPr txBox="1"/>
-          <p:nvPr/>
-        </p:nvSpPr>
-        <p:spPr>
-          <a:xfrm>
-            <a:off x="508200" y="4741842"/>
-            <a:ext cx="3520870" cy="1015663"/>
-          </a:xfrm>
-          <a:prstGeom prst="rect">
-            <a:avLst/>
-          </a:prstGeom>
-          <a:noFill/>
-        </p:spPr>
-        <p:txBody>
-          <a:bodyPr wrap="square">
-            <a:spAutoFit/>
-          </a:bodyPr>
-          <a:lstStyle/>
-          <a:p>
-            <a:r>
-              <a:rPr lang="pt-BR" sz="2000" b="1" u="sng" dirty="0"/>
-              <a:t>Foco</a:t>
-            </a:r>
-            <a:r>
-              <a:rPr lang="pt-BR" sz="2000" b="1" dirty="0"/>
-              <a:t>: </a:t>
-            </a:r>
-            <a:r>
-              <a:rPr lang="pt-BR" sz="2000" dirty="0"/>
-              <a:t>Distorção, stress residual</a:t>
-            </a:r>
-          </a:p>
-          <a:p>
-            <a:endParaRPr lang="pt-BR" sz="2000" dirty="0"/>
-          </a:p>
-          <a:p>
-            <a:r>
-              <a:rPr lang="pt-BR" sz="2000" b="1" u="sng" dirty="0"/>
-              <a:t>Métodos</a:t>
-            </a:r>
-            <a:r>
-              <a:rPr lang="pt-BR" sz="2000" b="1" dirty="0"/>
-              <a:t>:</a:t>
-            </a:r>
-            <a:r>
-              <a:rPr lang="pt-BR" sz="2000" dirty="0"/>
-              <a:t> FEM, FVM</a:t>
-            </a:r>
-            <a:endParaRPr lang="LID4096" sz="2000" dirty="0"/>
-          </a:p>
-        </p:txBody>
-      </p:sp>
-      <p:sp>
-        <p:nvSpPr>
-          <p:cNvPr id="4" name="TextBox 3">
-            <a:extLst>
-              <a:ext uri="{FF2B5EF4-FFF2-40B4-BE49-F238E27FC236}">
-                <a16:creationId xmlns:a16="http://schemas.microsoft.com/office/drawing/2014/main" id="{1AF793E5-19E5-D29C-D284-048AAFC498D3}"/>
-              </a:ext>
-            </a:extLst>
-          </p:cNvPr>
-          <p:cNvSpPr txBox="1"/>
-          <p:nvPr/>
-        </p:nvSpPr>
-        <p:spPr>
-          <a:xfrm>
-            <a:off x="4532480" y="4741843"/>
-            <a:ext cx="3343155" cy="1015663"/>
-          </a:xfrm>
-          <a:prstGeom prst="rect">
-            <a:avLst/>
-          </a:prstGeom>
-          <a:noFill/>
-        </p:spPr>
-        <p:txBody>
-          <a:bodyPr wrap="square">
-            <a:spAutoFit/>
-          </a:bodyPr>
-          <a:lstStyle/>
-          <a:p>
-            <a:r>
-              <a:rPr lang="pt-BR" sz="2000" b="1" u="sng" dirty="0"/>
-              <a:t>Foco</a:t>
-            </a:r>
-            <a:r>
-              <a:rPr lang="pt-BR" sz="2000" b="1" dirty="0"/>
-              <a:t>: </a:t>
-            </a:r>
-            <a:r>
-              <a:rPr lang="pt-BR" sz="2000" dirty="0"/>
-              <a:t>Fluxo, </a:t>
-            </a:r>
-            <a:r>
-              <a:rPr lang="pt-PT" sz="2000" dirty="0"/>
-              <a:t>poça de fusão</a:t>
-            </a:r>
-          </a:p>
-          <a:p>
-            <a:endParaRPr lang="pt-BR" sz="2000" dirty="0"/>
-          </a:p>
-          <a:p>
-            <a:r>
-              <a:rPr lang="pt-BR" sz="2000" b="1" u="sng" dirty="0"/>
-              <a:t>Métodos</a:t>
-            </a:r>
-            <a:r>
-              <a:rPr lang="pt-BR" sz="2000" b="1" dirty="0"/>
-              <a:t>:</a:t>
-            </a:r>
-            <a:r>
-              <a:rPr lang="pt-BR" sz="2000" dirty="0"/>
-              <a:t> CFD, SPH, LBM</a:t>
-            </a:r>
-            <a:endParaRPr lang="LID4096" sz="2000" dirty="0"/>
-          </a:p>
-        </p:txBody>
-      </p:sp>
-      <p:sp>
-        <p:nvSpPr>
-          <p:cNvPr id="6" name="TextBox 5">
-            <a:extLst>
-              <a:ext uri="{FF2B5EF4-FFF2-40B4-BE49-F238E27FC236}">
-                <a16:creationId xmlns:a16="http://schemas.microsoft.com/office/drawing/2014/main" id="{2921A13F-E240-B758-DA48-9CB20B91F2D0}"/>
-              </a:ext>
-            </a:extLst>
-          </p:cNvPr>
-          <p:cNvSpPr txBox="1"/>
-          <p:nvPr/>
-        </p:nvSpPr>
-        <p:spPr>
-          <a:xfrm>
-            <a:off x="8070678" y="4741843"/>
-            <a:ext cx="3343155" cy="1015663"/>
-          </a:xfrm>
-          <a:prstGeom prst="rect">
-            <a:avLst/>
-          </a:prstGeom>
-          <a:noFill/>
-        </p:spPr>
-        <p:txBody>
-          <a:bodyPr wrap="square">
-            <a:spAutoFit/>
-          </a:bodyPr>
-          <a:lstStyle/>
-          <a:p>
-            <a:r>
-              <a:rPr lang="pt-BR" sz="2000" b="1" u="sng" dirty="0"/>
-              <a:t>Foco</a:t>
-            </a:r>
-            <a:r>
-              <a:rPr lang="pt-BR" sz="2000" b="1" dirty="0"/>
-              <a:t>: </a:t>
-            </a:r>
-            <a:r>
-              <a:rPr lang="pt-BR" sz="2000" dirty="0"/>
-              <a:t>Grãos, nucleação, vazios  </a:t>
-            </a:r>
-          </a:p>
-          <a:p>
-            <a:endParaRPr lang="pt-BR" sz="2000" dirty="0"/>
-          </a:p>
-          <a:p>
-            <a:r>
-              <a:rPr lang="pt-BR" sz="2000" b="1" u="sng" dirty="0"/>
-              <a:t>Métodos</a:t>
-            </a:r>
-            <a:r>
-              <a:rPr lang="pt-BR" sz="2000" b="1" dirty="0"/>
-              <a:t>:</a:t>
-            </a:r>
-            <a:r>
-              <a:rPr lang="pt-BR" sz="2000" dirty="0"/>
-              <a:t> CA, MC, PF</a:t>
-            </a:r>
-            <a:endParaRPr lang="LID4096" sz="2000" dirty="0"/>
-          </a:p>
-        </p:txBody>
-      </p:sp>
-      <p:grpSp>
-        <p:nvGrpSpPr>
-          <p:cNvPr id="15" name="Group 14">
-            <a:extLst>
-              <a:ext uri="{FF2B5EF4-FFF2-40B4-BE49-F238E27FC236}">
-                <a16:creationId xmlns:a16="http://schemas.microsoft.com/office/drawing/2014/main" id="{30D92701-2C39-7EB4-A46C-F1AD49A526C1}"/>
-              </a:ext>
-            </a:extLst>
-          </p:cNvPr>
-          <p:cNvGrpSpPr/>
-          <p:nvPr/>
-        </p:nvGrpSpPr>
-        <p:grpSpPr>
-          <a:xfrm>
-            <a:off x="8128401" y="848105"/>
-            <a:ext cx="3363811" cy="1107996"/>
-            <a:chOff x="6653058" y="732502"/>
-            <a:chExt cx="3363811" cy="1107996"/>
-          </a:xfrm>
-        </p:grpSpPr>
-        <p:sp>
-          <p:nvSpPr>
-            <p:cNvPr id="9" name="TextBox 8">
-              <a:extLst>
-                <a:ext uri="{FF2B5EF4-FFF2-40B4-BE49-F238E27FC236}">
-                  <a16:creationId xmlns:a16="http://schemas.microsoft.com/office/drawing/2014/main" id="{9B12F553-9E88-0BC5-7CE8-BADD93E0B0F8}"/>
-                </a:ext>
-              </a:extLst>
-            </p:cNvPr>
-            <p:cNvSpPr txBox="1"/>
-            <p:nvPr/>
-          </p:nvSpPr>
-          <p:spPr>
-            <a:xfrm>
-              <a:off x="6673714" y="1194167"/>
-              <a:ext cx="3343155" cy="646331"/>
-            </a:xfrm>
-            <a:prstGeom prst="rect">
-              <a:avLst/>
-            </a:prstGeom>
-            <a:noFill/>
-          </p:spPr>
-          <p:txBody>
-            <a:bodyPr wrap="square">
-              <a:spAutoFit/>
-            </a:bodyPr>
-            <a:lstStyle/>
-            <a:p>
-              <a:r>
-                <a:rPr lang="LID4096" dirty="0"/>
-                <a:t>grain growth, microstructural transitions, solidification kinetics</a:t>
-              </a:r>
-            </a:p>
-          </p:txBody>
-        </p:sp>
-        <p:sp>
-          <p:nvSpPr>
-            <p:cNvPr id="13" name="TextBox 12">
-              <a:extLst>
-                <a:ext uri="{FF2B5EF4-FFF2-40B4-BE49-F238E27FC236}">
-                  <a16:creationId xmlns:a16="http://schemas.microsoft.com/office/drawing/2014/main" id="{4C812636-A4FB-E46F-694E-EE55083C9D34}"/>
-                </a:ext>
-              </a:extLst>
-            </p:cNvPr>
-            <p:cNvSpPr txBox="1"/>
-            <p:nvPr/>
-          </p:nvSpPr>
-          <p:spPr>
-            <a:xfrm>
-              <a:off x="6653058" y="732502"/>
-              <a:ext cx="3069410" cy="461665"/>
-            </a:xfrm>
-            <a:prstGeom prst="rect">
-              <a:avLst/>
-            </a:prstGeom>
-            <a:noFill/>
-          </p:spPr>
-          <p:txBody>
-            <a:bodyPr wrap="square">
-              <a:spAutoFit/>
-            </a:bodyPr>
-            <a:lstStyle/>
-            <a:p>
-              <a:pPr algn="just"/>
-              <a:r>
-                <a:rPr lang="en-GB" sz="2400" b="1" i="0" u="sng" strike="noStrike" baseline="0" dirty="0">
-                  <a:solidFill>
-                    <a:srgbClr val="FF0000"/>
-                  </a:solidFill>
-                  <a:latin typeface="Times New Roman" panose="02020603050405020304" pitchFamily="18" charset="0"/>
-                </a:rPr>
-                <a:t>Micro-scale</a:t>
-              </a:r>
-              <a:r>
-                <a:rPr lang="en-GB" sz="1800" b="1" i="0" u="sng" strike="noStrike" baseline="0" dirty="0">
-                  <a:solidFill>
-                    <a:srgbClr val="000000"/>
-                  </a:solidFill>
-                  <a:latin typeface="Times New Roman" panose="02020603050405020304" pitchFamily="18" charset="0"/>
-                </a:rPr>
-                <a:t> phase-field</a:t>
-              </a:r>
-              <a:endParaRPr lang="LID4096" dirty="0"/>
-            </a:p>
-          </p:txBody>
-        </p:sp>
-      </p:grpSp>
-      <p:sp>
-        <p:nvSpPr>
-          <p:cNvPr id="17" name="Arrow: Right 16">
-            <a:extLst>
-              <a:ext uri="{FF2B5EF4-FFF2-40B4-BE49-F238E27FC236}">
-                <a16:creationId xmlns:a16="http://schemas.microsoft.com/office/drawing/2014/main" id="{0D99E177-98AB-1609-405B-9D306F0BC69F}"/>
-              </a:ext>
-            </a:extLst>
-          </p:cNvPr>
-          <p:cNvSpPr/>
-          <p:nvPr/>
-        </p:nvSpPr>
-        <p:spPr>
-          <a:xfrm rot="19318681">
-            <a:off x="5533143" y="5799629"/>
-            <a:ext cx="426720" cy="338895"/>
-          </a:xfrm>
-          <a:prstGeom prst="rightArrow">
-            <a:avLst/>
-          </a:prstGeom>
-        </p:spPr>
-        <p:style>
-          <a:lnRef idx="2">
-            <a:schemeClr val="accent1">
-              <a:shade val="15000"/>
-            </a:schemeClr>
-          </a:lnRef>
-          <a:fillRef idx="1">
-            <a:schemeClr val="accent1"/>
-          </a:fillRef>
-          <a:effectRef idx="0">
-            <a:schemeClr val="accent1"/>
-          </a:effectRef>
-          <a:fontRef idx="minor">
-            <a:schemeClr val="lt1"/>
-          </a:fontRef>
-        </p:style>
-        <p:txBody>
-          <a:bodyPr rtlCol="0" anchor="ctr"/>
-          <a:lstStyle/>
-          <a:p>
-            <a:pPr algn="ctr"/>
-            <a:endParaRPr lang="LID4096"/>
-          </a:p>
-        </p:txBody>
-      </p:sp>
-      <p:sp>
-        <p:nvSpPr>
-          <p:cNvPr id="31" name="TextBox 30">
-            <a:extLst>
-              <a:ext uri="{FF2B5EF4-FFF2-40B4-BE49-F238E27FC236}">
-                <a16:creationId xmlns:a16="http://schemas.microsoft.com/office/drawing/2014/main" id="{24EBBB04-CED1-CA15-A508-9EEC5791E0AF}"/>
-              </a:ext>
-            </a:extLst>
-          </p:cNvPr>
-          <p:cNvSpPr txBox="1"/>
-          <p:nvPr/>
-        </p:nvSpPr>
-        <p:spPr>
-          <a:xfrm>
-            <a:off x="4578282" y="894272"/>
-            <a:ext cx="2943995" cy="1015663"/>
-          </a:xfrm>
-          <a:prstGeom prst="rect">
-            <a:avLst/>
-          </a:prstGeom>
-          <a:noFill/>
-        </p:spPr>
-        <p:txBody>
-          <a:bodyPr wrap="square">
-            <a:spAutoFit/>
-          </a:bodyPr>
-          <a:lstStyle/>
-          <a:p>
-            <a:r>
-              <a:rPr lang="en-GB" sz="2400" b="1" i="0" u="sng" strike="noStrike" baseline="0" dirty="0">
-                <a:solidFill>
-                  <a:srgbClr val="FF0000"/>
-                </a:solidFill>
-                <a:latin typeface="Times New Roman" panose="02020603050405020304" pitchFamily="18" charset="0"/>
-              </a:rPr>
-              <a:t>Meso-scale</a:t>
-            </a:r>
-            <a:r>
-              <a:rPr lang="en-GB" sz="1800" b="1" i="0" u="sng" strike="noStrike" baseline="0" dirty="0">
-                <a:solidFill>
-                  <a:srgbClr val="000000"/>
-                </a:solidFill>
-                <a:latin typeface="Times New Roman" panose="02020603050405020304" pitchFamily="18" charset="0"/>
-              </a:rPr>
-              <a:t> models</a:t>
-            </a:r>
-            <a:r>
-              <a:rPr lang="en-GB" sz="1800" b="0" i="0" u="none" strike="noStrike" baseline="0" dirty="0">
-                <a:solidFill>
-                  <a:srgbClr val="000000"/>
-                </a:solidFill>
-                <a:latin typeface="Times New Roman" panose="02020603050405020304" pitchFamily="18" charset="0"/>
-              </a:rPr>
-              <a:t> </a:t>
-            </a:r>
-          </a:p>
-          <a:p>
-            <a:r>
-              <a:rPr lang="en-GB" sz="1800" b="0" i="0" u="none" strike="noStrike" baseline="0" dirty="0">
-                <a:solidFill>
-                  <a:srgbClr val="000000"/>
-                </a:solidFill>
-                <a:latin typeface="Times New Roman" panose="02020603050405020304" pitchFamily="18" charset="0"/>
-              </a:rPr>
-              <a:t>pool geometry, bead formation, and dilution. </a:t>
-            </a:r>
-            <a:endParaRPr lang="LID4096" dirty="0"/>
-          </a:p>
-        </p:txBody>
-      </p:sp>
-      <p:cxnSp>
-        <p:nvCxnSpPr>
-          <p:cNvPr id="32" name="Straight Connector 31">
-            <a:extLst>
-              <a:ext uri="{FF2B5EF4-FFF2-40B4-BE49-F238E27FC236}">
-                <a16:creationId xmlns:a16="http://schemas.microsoft.com/office/drawing/2014/main" id="{CA6E7739-B156-5FE7-31E7-3EC340D9E0CF}"/>
-              </a:ext>
-            </a:extLst>
-          </p:cNvPr>
-          <p:cNvCxnSpPr>
-            <a:cxnSpLocks/>
-          </p:cNvCxnSpPr>
-          <p:nvPr/>
-        </p:nvCxnSpPr>
-        <p:spPr>
-          <a:xfrm>
-            <a:off x="4154277" y="547276"/>
-            <a:ext cx="0" cy="1371600"/>
-          </a:xfrm>
-          <a:prstGeom prst="line">
-            <a:avLst/>
-          </a:prstGeom>
-          <a:ln>
-            <a:solidFill>
-              <a:schemeClr val="tx1"/>
-            </a:solidFill>
-          </a:ln>
-          <a:effectLst>
-            <a:outerShdw blurRad="50800" dist="38100" dir="8100000" algn="tr" rotWithShape="0">
-              <a:prstClr val="black">
-                <a:alpha val="40000"/>
-              </a:prstClr>
-            </a:outerShdw>
-          </a:effectLst>
-        </p:spPr>
-        <p:style>
-          <a:lnRef idx="1">
-            <a:schemeClr val="accent1"/>
-          </a:lnRef>
-          <a:fillRef idx="0">
-            <a:schemeClr val="accent1"/>
-          </a:fillRef>
-          <a:effectRef idx="0">
-            <a:schemeClr val="accent1"/>
-          </a:effectRef>
-          <a:fontRef idx="minor">
-            <a:schemeClr val="tx1"/>
-          </a:fontRef>
-        </p:style>
-      </p:cxnSp>
-      <p:cxnSp>
-        <p:nvCxnSpPr>
-          <p:cNvPr id="33" name="Straight Connector 32">
-            <a:extLst>
-              <a:ext uri="{FF2B5EF4-FFF2-40B4-BE49-F238E27FC236}">
-                <a16:creationId xmlns:a16="http://schemas.microsoft.com/office/drawing/2014/main" id="{62973B47-50DE-DA68-A410-F1ABE21EDF32}"/>
-              </a:ext>
-            </a:extLst>
-          </p:cNvPr>
-          <p:cNvCxnSpPr>
-            <a:cxnSpLocks/>
-          </p:cNvCxnSpPr>
-          <p:nvPr/>
-        </p:nvCxnSpPr>
-        <p:spPr>
-          <a:xfrm>
-            <a:off x="7692476" y="547275"/>
-            <a:ext cx="0" cy="1371600"/>
-          </a:xfrm>
-          <a:prstGeom prst="line">
-            <a:avLst/>
-          </a:prstGeom>
-          <a:ln>
-            <a:solidFill>
-              <a:schemeClr val="tx1"/>
-            </a:solidFill>
-          </a:ln>
-          <a:effectLst>
-            <a:outerShdw blurRad="50800" dist="38100" dir="8100000" algn="tr" rotWithShape="0">
-              <a:prstClr val="black">
-                <a:alpha val="40000"/>
-              </a:prstClr>
-            </a:outerShdw>
-          </a:effectLst>
-        </p:spPr>
-        <p:style>
-          <a:lnRef idx="1">
-            <a:schemeClr val="accent1"/>
-          </a:lnRef>
-          <a:fillRef idx="0">
-            <a:schemeClr val="accent1"/>
-          </a:fillRef>
-          <a:effectRef idx="0">
-            <a:schemeClr val="accent1"/>
-          </a:effectRef>
-          <a:fontRef idx="minor">
-            <a:schemeClr val="tx1"/>
-          </a:fontRef>
-        </p:style>
-      </p:cxnSp>
-      <p:cxnSp>
-        <p:nvCxnSpPr>
-          <p:cNvPr id="34" name="Straight Connector 33">
-            <a:extLst>
-              <a:ext uri="{FF2B5EF4-FFF2-40B4-BE49-F238E27FC236}">
-                <a16:creationId xmlns:a16="http://schemas.microsoft.com/office/drawing/2014/main" id="{4C115BA8-7EB1-9D87-ECF4-114E0CA95B6D}"/>
-              </a:ext>
-            </a:extLst>
-          </p:cNvPr>
-          <p:cNvCxnSpPr>
-            <a:cxnSpLocks/>
-          </p:cNvCxnSpPr>
-          <p:nvPr/>
-        </p:nvCxnSpPr>
-        <p:spPr>
-          <a:xfrm>
-            <a:off x="4154277" y="4618534"/>
-            <a:ext cx="0" cy="1371600"/>
-          </a:xfrm>
-          <a:prstGeom prst="line">
-            <a:avLst/>
-          </a:prstGeom>
-          <a:ln>
-            <a:solidFill>
-              <a:schemeClr val="tx1"/>
-            </a:solidFill>
-          </a:ln>
-          <a:effectLst>
-            <a:outerShdw blurRad="50800" dist="38100" dir="8100000" algn="tr" rotWithShape="0">
-              <a:prstClr val="black">
-                <a:alpha val="40000"/>
-              </a:prstClr>
-            </a:outerShdw>
-          </a:effectLst>
-        </p:spPr>
-        <p:style>
-          <a:lnRef idx="1">
-            <a:schemeClr val="accent1"/>
-          </a:lnRef>
-          <a:fillRef idx="0">
-            <a:schemeClr val="accent1"/>
-          </a:fillRef>
-          <a:effectRef idx="0">
-            <a:schemeClr val="accent1"/>
-          </a:effectRef>
-          <a:fontRef idx="minor">
-            <a:schemeClr val="tx1"/>
-          </a:fontRef>
-        </p:style>
-      </p:cxnSp>
-      <p:cxnSp>
-        <p:nvCxnSpPr>
-          <p:cNvPr id="35" name="Straight Connector 34">
-            <a:extLst>
-              <a:ext uri="{FF2B5EF4-FFF2-40B4-BE49-F238E27FC236}">
-                <a16:creationId xmlns:a16="http://schemas.microsoft.com/office/drawing/2014/main" id="{C632C9D7-49BC-51C2-3E0C-82CDC84270CC}"/>
-              </a:ext>
-            </a:extLst>
-          </p:cNvPr>
-          <p:cNvCxnSpPr>
-            <a:cxnSpLocks/>
-          </p:cNvCxnSpPr>
-          <p:nvPr/>
-        </p:nvCxnSpPr>
-        <p:spPr>
-          <a:xfrm>
-            <a:off x="7692476" y="4618533"/>
-            <a:ext cx="0" cy="1371600"/>
-          </a:xfrm>
-          <a:prstGeom prst="line">
-            <a:avLst/>
-          </a:prstGeom>
-          <a:ln>
-            <a:solidFill>
-              <a:schemeClr val="tx1"/>
-            </a:solidFill>
-          </a:ln>
-          <a:effectLst>
-            <a:outerShdw blurRad="50800" dist="38100" dir="8100000" algn="tr" rotWithShape="0">
-              <a:prstClr val="black">
-                <a:alpha val="40000"/>
-              </a:prstClr>
-            </a:outerShdw>
-          </a:effectLst>
-        </p:spPr>
-        <p:style>
-          <a:lnRef idx="1">
-            <a:schemeClr val="accent1"/>
-          </a:lnRef>
-          <a:fillRef idx="0">
-            <a:schemeClr val="accent1"/>
-          </a:fillRef>
-          <a:effectRef idx="0">
-            <a:schemeClr val="accent1"/>
-          </a:effectRef>
-          <a:fontRef idx="minor">
-            <a:schemeClr val="tx1"/>
-          </a:fontRef>
-        </p:style>
-      </p:cxnSp>
-    </p:spTree>
-    <p:extLst>
-      <p:ext uri="{BB962C8B-B14F-4D97-AF65-F5344CB8AC3E}">
-        <p14:creationId xmlns:p14="http://schemas.microsoft.com/office/powerpoint/2010/main" val="3961323624"/>
-      </p:ext>
-    </p:extLst>
-  </p:cSld>
-  <p:clrMapOvr>
-    <a:masterClrMapping/>
-  </p:clrMapOvr>
-</p:sld>
-</file>
-
-<file path=ppt/slides/slide5.xml><?xml version="1.0" encoding="utf-8"?>
 <p:sld xmlns:a="http://schemas.openxmlformats.org/drawingml/2006/main" xmlns:r="http://schemas.openxmlformats.org/officeDocument/2006/relationships" xmlns:p="http://schemas.openxmlformats.org/presentationml/2006/main">
   <p:cSld>
     <p:spTree>
@@ -8886,6 +8047,884 @@
 </p:sld>
 </file>
 
+<file path=ppt/slides/slide5.xml><?xml version="1.0" encoding="utf-8"?>
+<p:sld xmlns:a="http://schemas.openxmlformats.org/drawingml/2006/main" xmlns:r="http://schemas.openxmlformats.org/officeDocument/2006/relationships" xmlns:p="http://schemas.openxmlformats.org/presentationml/2006/main">
+  <p:cSld>
+    <p:spTree>
+      <p:nvGrpSpPr>
+        <p:cNvPr id="1" name="">
+          <a:extLst>
+            <a:ext uri="{FF2B5EF4-FFF2-40B4-BE49-F238E27FC236}">
+              <a16:creationId xmlns:a16="http://schemas.microsoft.com/office/drawing/2014/main" id="{62B4FED2-8C2D-CBC5-EC1D-3E567474348F}"/>
+            </a:ext>
+          </a:extLst>
+        </p:cNvPr>
+        <p:cNvGrpSpPr/>
+        <p:nvPr/>
+      </p:nvGrpSpPr>
+      <p:grpSpPr>
+        <a:xfrm>
+          <a:off x="0" y="0"/>
+          <a:ext cx="0" cy="0"/>
+          <a:chOff x="0" y="0"/>
+          <a:chExt cx="0" cy="0"/>
+        </a:xfrm>
+      </p:grpSpPr>
+      <p:grpSp>
+        <p:nvGrpSpPr>
+          <p:cNvPr id="8" name="Group 7">
+            <a:extLst>
+              <a:ext uri="{FF2B5EF4-FFF2-40B4-BE49-F238E27FC236}">
+                <a16:creationId xmlns:a16="http://schemas.microsoft.com/office/drawing/2014/main" id="{1931FF7F-D890-000A-DBE8-01F406BEC642}"/>
+              </a:ext>
+            </a:extLst>
+          </p:cNvPr>
+          <p:cNvGrpSpPr>
+            <a:grpSpLocks noChangeAspect="1"/>
+          </p:cNvGrpSpPr>
+          <p:nvPr/>
+        </p:nvGrpSpPr>
+        <p:grpSpPr>
+          <a:xfrm>
+            <a:off x="699788" y="2240676"/>
+            <a:ext cx="10792424" cy="2244475"/>
+            <a:chOff x="1022745" y="1409461"/>
+            <a:chExt cx="10669753" cy="2285845"/>
+          </a:xfrm>
+        </p:grpSpPr>
+        <p:pic>
+          <p:nvPicPr>
+            <p:cNvPr id="5" name="Picture 4">
+              <a:extLst>
+                <a:ext uri="{FF2B5EF4-FFF2-40B4-BE49-F238E27FC236}">
+                  <a16:creationId xmlns:a16="http://schemas.microsoft.com/office/drawing/2014/main" id="{C5A93156-15E9-6FCC-08A2-D16608D8EBEF}"/>
+                </a:ext>
+              </a:extLst>
+            </p:cNvPr>
+            <p:cNvPicPr>
+              <a:picLocks noChangeAspect="1"/>
+            </p:cNvPicPr>
+            <p:nvPr/>
+          </p:nvPicPr>
+          <p:blipFill>
+            <a:blip r:embed="rId2"/>
+            <a:srcRect t="17529" b="51086"/>
+            <a:stretch>
+              <a:fillRect/>
+            </a:stretch>
+          </p:blipFill>
+          <p:spPr>
+            <a:xfrm>
+              <a:off x="1022745" y="1409461"/>
+              <a:ext cx="10669753" cy="2210431"/>
+            </a:xfrm>
+            <a:prstGeom prst="rect">
+              <a:avLst/>
+            </a:prstGeom>
+          </p:spPr>
+        </p:pic>
+        <p:sp>
+          <p:nvSpPr>
+            <p:cNvPr id="7" name="Rectangle 6">
+              <a:extLst>
+                <a:ext uri="{FF2B5EF4-FFF2-40B4-BE49-F238E27FC236}">
+                  <a16:creationId xmlns:a16="http://schemas.microsoft.com/office/drawing/2014/main" id="{7700BA0A-1C05-83BB-E2E6-874CF37D9164}"/>
+                </a:ext>
+              </a:extLst>
+            </p:cNvPr>
+            <p:cNvSpPr/>
+            <p:nvPr/>
+          </p:nvSpPr>
+          <p:spPr>
+            <a:xfrm>
+              <a:off x="4694548" y="3381865"/>
+              <a:ext cx="3073139" cy="313441"/>
+            </a:xfrm>
+            <a:prstGeom prst="rect">
+              <a:avLst/>
+            </a:prstGeom>
+            <a:solidFill>
+              <a:schemeClr val="bg1"/>
+            </a:solidFill>
+            <a:ln>
+              <a:solidFill>
+                <a:schemeClr val="bg1"/>
+              </a:solidFill>
+            </a:ln>
+          </p:spPr>
+          <p:style>
+            <a:lnRef idx="2">
+              <a:schemeClr val="accent1">
+                <a:shade val="15000"/>
+              </a:schemeClr>
+            </a:lnRef>
+            <a:fillRef idx="1">
+              <a:schemeClr val="accent1"/>
+            </a:fillRef>
+            <a:effectRef idx="0">
+              <a:schemeClr val="accent1"/>
+            </a:effectRef>
+            <a:fontRef idx="minor">
+              <a:schemeClr val="lt1"/>
+            </a:fontRef>
+          </p:style>
+          <p:txBody>
+            <a:bodyPr rtlCol="0" anchor="ctr"/>
+            <a:lstStyle/>
+            <a:p>
+              <a:pPr algn="ctr"/>
+              <a:endParaRPr lang="LID4096" dirty="0"/>
+            </a:p>
+          </p:txBody>
+        </p:sp>
+      </p:grpSp>
+      <p:sp>
+        <p:nvSpPr>
+          <p:cNvPr id="21" name="TextBox 20">
+            <a:extLst>
+              <a:ext uri="{FF2B5EF4-FFF2-40B4-BE49-F238E27FC236}">
+                <a16:creationId xmlns:a16="http://schemas.microsoft.com/office/drawing/2014/main" id="{1579ACB3-1D08-3FBB-935E-915DB5103E55}"/>
+              </a:ext>
+            </a:extLst>
+          </p:cNvPr>
+          <p:cNvSpPr txBox="1"/>
+          <p:nvPr/>
+        </p:nvSpPr>
+        <p:spPr>
+          <a:xfrm>
+            <a:off x="532889" y="908670"/>
+            <a:ext cx="3409386" cy="1015663"/>
+          </a:xfrm>
+          <a:prstGeom prst="rect">
+            <a:avLst/>
+          </a:prstGeom>
+          <a:noFill/>
+        </p:spPr>
+        <p:txBody>
+          <a:bodyPr wrap="square">
+            <a:spAutoFit/>
+          </a:bodyPr>
+          <a:lstStyle/>
+          <a:p>
+            <a:pPr algn="just"/>
+            <a:r>
+              <a:rPr lang="en-GB" sz="2400" b="1" i="0" u="sng" strike="noStrike" baseline="0" dirty="0">
+                <a:solidFill>
+                  <a:srgbClr val="FF0000"/>
+                </a:solidFill>
+                <a:latin typeface="Times New Roman" panose="02020603050405020304" pitchFamily="18" charset="0"/>
+              </a:rPr>
+              <a:t>Macro-scale</a:t>
+            </a:r>
+            <a:r>
+              <a:rPr lang="en-GB" sz="1800" b="1" i="0" u="sng" strike="noStrike" baseline="0" dirty="0">
+                <a:solidFill>
+                  <a:srgbClr val="000000"/>
+                </a:solidFill>
+                <a:latin typeface="Times New Roman" panose="02020603050405020304" pitchFamily="18" charset="0"/>
+              </a:rPr>
+              <a:t> models</a:t>
+            </a:r>
+            <a:r>
+              <a:rPr lang="en-GB" sz="1800" b="0" i="0" u="none" strike="noStrike" baseline="0" dirty="0">
+                <a:solidFill>
+                  <a:srgbClr val="000000"/>
+                </a:solidFill>
+                <a:latin typeface="Times New Roman" panose="02020603050405020304" pitchFamily="18" charset="0"/>
+              </a:rPr>
+              <a:t> </a:t>
+            </a:r>
+          </a:p>
+          <a:p>
+            <a:r>
+              <a:rPr lang="en-GB" sz="1800" b="0" i="0" u="none" strike="noStrike" baseline="0" dirty="0">
+                <a:solidFill>
+                  <a:srgbClr val="000000"/>
+                </a:solidFill>
+                <a:latin typeface="Times New Roman" panose="02020603050405020304" pitchFamily="18" charset="0"/>
+              </a:rPr>
+              <a:t>heat flow and structural (stress) deformation &amp; </a:t>
+            </a:r>
+            <a:r>
+              <a:rPr lang="en-GB" dirty="0">
+                <a:solidFill>
+                  <a:srgbClr val="000000"/>
+                </a:solidFill>
+                <a:latin typeface="Times New Roman" panose="02020603050405020304" pitchFamily="18" charset="0"/>
+              </a:rPr>
+              <a:t>interlayer bonding,</a:t>
+            </a:r>
+            <a:endParaRPr lang="LID4096" dirty="0"/>
+          </a:p>
+        </p:txBody>
+      </p:sp>
+      <p:sp>
+        <p:nvSpPr>
+          <p:cNvPr id="28" name="TextBox 27">
+            <a:extLst>
+              <a:ext uri="{FF2B5EF4-FFF2-40B4-BE49-F238E27FC236}">
+                <a16:creationId xmlns:a16="http://schemas.microsoft.com/office/drawing/2014/main" id="{54690474-BDEF-D3E4-E001-BF8A037259C1}"/>
+              </a:ext>
+            </a:extLst>
+          </p:cNvPr>
+          <p:cNvSpPr txBox="1"/>
+          <p:nvPr/>
+        </p:nvSpPr>
+        <p:spPr>
+          <a:xfrm>
+            <a:off x="322120" y="108030"/>
+            <a:ext cx="6094428" cy="523220"/>
+          </a:xfrm>
+          <a:prstGeom prst="rect">
+            <a:avLst/>
+          </a:prstGeom>
+          <a:noFill/>
+        </p:spPr>
+        <p:txBody>
+          <a:bodyPr wrap="square">
+            <a:spAutoFit/>
+          </a:bodyPr>
+          <a:lstStyle/>
+          <a:p>
+            <a:r>
+              <a:rPr lang="pt-BR" sz="2800" b="1" dirty="0">
+                <a:effectLst>
+                  <a:outerShdw blurRad="38100" dist="38100" dir="2700000" algn="tl">
+                    <a:srgbClr val="000000">
+                      <a:alpha val="43137"/>
+                    </a:srgbClr>
+                  </a:outerShdw>
+                </a:effectLst>
+              </a:rPr>
+              <a:t>MODELAGEM</a:t>
+            </a:r>
+            <a:endParaRPr lang="LID4096" sz="2000" dirty="0"/>
+          </a:p>
+        </p:txBody>
+      </p:sp>
+      <p:sp>
+        <p:nvSpPr>
+          <p:cNvPr id="3" name="TextBox 2">
+            <a:extLst>
+              <a:ext uri="{FF2B5EF4-FFF2-40B4-BE49-F238E27FC236}">
+                <a16:creationId xmlns:a16="http://schemas.microsoft.com/office/drawing/2014/main" id="{7A9585BF-3078-B5E5-DCD6-6FC3D4B4C024}"/>
+              </a:ext>
+            </a:extLst>
+          </p:cNvPr>
+          <p:cNvSpPr txBox="1"/>
+          <p:nvPr/>
+        </p:nvSpPr>
+        <p:spPr>
+          <a:xfrm>
+            <a:off x="508200" y="4741842"/>
+            <a:ext cx="3520870" cy="1015663"/>
+          </a:xfrm>
+          <a:prstGeom prst="rect">
+            <a:avLst/>
+          </a:prstGeom>
+          <a:noFill/>
+        </p:spPr>
+        <p:txBody>
+          <a:bodyPr wrap="square">
+            <a:spAutoFit/>
+          </a:bodyPr>
+          <a:lstStyle/>
+          <a:p>
+            <a:r>
+              <a:rPr lang="pt-BR" sz="2000" b="1" u="sng" dirty="0"/>
+              <a:t>Foco</a:t>
+            </a:r>
+            <a:r>
+              <a:rPr lang="pt-BR" sz="2000" b="1" dirty="0"/>
+              <a:t>: </a:t>
+            </a:r>
+            <a:r>
+              <a:rPr lang="pt-BR" sz="2000" dirty="0"/>
+              <a:t>Distorção, stress residual</a:t>
+            </a:r>
+          </a:p>
+          <a:p>
+            <a:endParaRPr lang="pt-BR" sz="2000" dirty="0"/>
+          </a:p>
+          <a:p>
+            <a:r>
+              <a:rPr lang="pt-BR" sz="2000" b="1" u="sng" dirty="0"/>
+              <a:t>Métodos</a:t>
+            </a:r>
+            <a:r>
+              <a:rPr lang="pt-BR" sz="2000" b="1" dirty="0"/>
+              <a:t>:</a:t>
+            </a:r>
+            <a:r>
+              <a:rPr lang="pt-BR" sz="2000" dirty="0"/>
+              <a:t> FEM, FVM</a:t>
+            </a:r>
+            <a:endParaRPr lang="LID4096" sz="2000" dirty="0"/>
+          </a:p>
+        </p:txBody>
+      </p:sp>
+      <p:sp>
+        <p:nvSpPr>
+          <p:cNvPr id="4" name="TextBox 3">
+            <a:extLst>
+              <a:ext uri="{FF2B5EF4-FFF2-40B4-BE49-F238E27FC236}">
+                <a16:creationId xmlns:a16="http://schemas.microsoft.com/office/drawing/2014/main" id="{1AF793E5-19E5-D29C-D284-048AAFC498D3}"/>
+              </a:ext>
+            </a:extLst>
+          </p:cNvPr>
+          <p:cNvSpPr txBox="1"/>
+          <p:nvPr/>
+        </p:nvSpPr>
+        <p:spPr>
+          <a:xfrm>
+            <a:off x="4532480" y="4741843"/>
+            <a:ext cx="3343155" cy="1015663"/>
+          </a:xfrm>
+          <a:prstGeom prst="rect">
+            <a:avLst/>
+          </a:prstGeom>
+          <a:noFill/>
+        </p:spPr>
+        <p:txBody>
+          <a:bodyPr wrap="square">
+            <a:spAutoFit/>
+          </a:bodyPr>
+          <a:lstStyle/>
+          <a:p>
+            <a:r>
+              <a:rPr lang="pt-BR" sz="2000" b="1" u="sng" dirty="0"/>
+              <a:t>Foco</a:t>
+            </a:r>
+            <a:r>
+              <a:rPr lang="pt-BR" sz="2000" b="1" dirty="0"/>
+              <a:t>: </a:t>
+            </a:r>
+            <a:r>
+              <a:rPr lang="pt-BR" sz="2000" dirty="0"/>
+              <a:t>Fluxo, </a:t>
+            </a:r>
+            <a:r>
+              <a:rPr lang="pt-PT" sz="2000" dirty="0"/>
+              <a:t>poça de fusão</a:t>
+            </a:r>
+          </a:p>
+          <a:p>
+            <a:endParaRPr lang="pt-BR" sz="2000" dirty="0"/>
+          </a:p>
+          <a:p>
+            <a:r>
+              <a:rPr lang="pt-BR" sz="2000" b="1" u="sng" dirty="0"/>
+              <a:t>Métodos</a:t>
+            </a:r>
+            <a:r>
+              <a:rPr lang="pt-BR" sz="2000" b="1" dirty="0"/>
+              <a:t>:</a:t>
+            </a:r>
+            <a:r>
+              <a:rPr lang="pt-BR" sz="2000" dirty="0"/>
+              <a:t> CFD, SPH, LBM</a:t>
+            </a:r>
+            <a:endParaRPr lang="LID4096" sz="2000" dirty="0"/>
+          </a:p>
+        </p:txBody>
+      </p:sp>
+      <p:sp>
+        <p:nvSpPr>
+          <p:cNvPr id="6" name="TextBox 5">
+            <a:extLst>
+              <a:ext uri="{FF2B5EF4-FFF2-40B4-BE49-F238E27FC236}">
+                <a16:creationId xmlns:a16="http://schemas.microsoft.com/office/drawing/2014/main" id="{2921A13F-E240-B758-DA48-9CB20B91F2D0}"/>
+              </a:ext>
+            </a:extLst>
+          </p:cNvPr>
+          <p:cNvSpPr txBox="1"/>
+          <p:nvPr/>
+        </p:nvSpPr>
+        <p:spPr>
+          <a:xfrm>
+            <a:off x="8070678" y="4741843"/>
+            <a:ext cx="3343155" cy="1015663"/>
+          </a:xfrm>
+          <a:prstGeom prst="rect">
+            <a:avLst/>
+          </a:prstGeom>
+          <a:noFill/>
+        </p:spPr>
+        <p:txBody>
+          <a:bodyPr wrap="square">
+            <a:spAutoFit/>
+          </a:bodyPr>
+          <a:lstStyle/>
+          <a:p>
+            <a:r>
+              <a:rPr lang="pt-BR" sz="2000" b="1" u="sng" dirty="0"/>
+              <a:t>Foco</a:t>
+            </a:r>
+            <a:r>
+              <a:rPr lang="pt-BR" sz="2000" b="1" dirty="0"/>
+              <a:t>: </a:t>
+            </a:r>
+            <a:r>
+              <a:rPr lang="pt-BR" sz="2000" dirty="0"/>
+              <a:t>Grãos, nucleação, vazios  </a:t>
+            </a:r>
+          </a:p>
+          <a:p>
+            <a:endParaRPr lang="pt-BR" sz="2000" dirty="0"/>
+          </a:p>
+          <a:p>
+            <a:r>
+              <a:rPr lang="pt-BR" sz="2000" b="1" u="sng" dirty="0"/>
+              <a:t>Métodos</a:t>
+            </a:r>
+            <a:r>
+              <a:rPr lang="pt-BR" sz="2000" b="1" dirty="0"/>
+              <a:t>:</a:t>
+            </a:r>
+            <a:r>
+              <a:rPr lang="pt-BR" sz="2000" dirty="0"/>
+              <a:t> CA, MC, PF</a:t>
+            </a:r>
+            <a:endParaRPr lang="LID4096" sz="2000" dirty="0"/>
+          </a:p>
+        </p:txBody>
+      </p:sp>
+      <p:grpSp>
+        <p:nvGrpSpPr>
+          <p:cNvPr id="15" name="Group 14">
+            <a:extLst>
+              <a:ext uri="{FF2B5EF4-FFF2-40B4-BE49-F238E27FC236}">
+                <a16:creationId xmlns:a16="http://schemas.microsoft.com/office/drawing/2014/main" id="{30D92701-2C39-7EB4-A46C-F1AD49A526C1}"/>
+              </a:ext>
+            </a:extLst>
+          </p:cNvPr>
+          <p:cNvGrpSpPr/>
+          <p:nvPr/>
+        </p:nvGrpSpPr>
+        <p:grpSpPr>
+          <a:xfrm>
+            <a:off x="8128401" y="848105"/>
+            <a:ext cx="3363811" cy="1107996"/>
+            <a:chOff x="6653058" y="732502"/>
+            <a:chExt cx="3363811" cy="1107996"/>
+          </a:xfrm>
+        </p:grpSpPr>
+        <p:sp>
+          <p:nvSpPr>
+            <p:cNvPr id="9" name="TextBox 8">
+              <a:extLst>
+                <a:ext uri="{FF2B5EF4-FFF2-40B4-BE49-F238E27FC236}">
+                  <a16:creationId xmlns:a16="http://schemas.microsoft.com/office/drawing/2014/main" id="{9B12F553-9E88-0BC5-7CE8-BADD93E0B0F8}"/>
+                </a:ext>
+              </a:extLst>
+            </p:cNvPr>
+            <p:cNvSpPr txBox="1"/>
+            <p:nvPr/>
+          </p:nvSpPr>
+          <p:spPr>
+            <a:xfrm>
+              <a:off x="6673714" y="1194167"/>
+              <a:ext cx="3343155" cy="646331"/>
+            </a:xfrm>
+            <a:prstGeom prst="rect">
+              <a:avLst/>
+            </a:prstGeom>
+            <a:noFill/>
+          </p:spPr>
+          <p:txBody>
+            <a:bodyPr wrap="square">
+              <a:spAutoFit/>
+            </a:bodyPr>
+            <a:lstStyle/>
+            <a:p>
+              <a:r>
+                <a:rPr lang="LID4096" dirty="0"/>
+                <a:t>grain growth, microstructural transitions, solidification kinetics</a:t>
+              </a:r>
+            </a:p>
+          </p:txBody>
+        </p:sp>
+        <p:sp>
+          <p:nvSpPr>
+            <p:cNvPr id="13" name="TextBox 12">
+              <a:extLst>
+                <a:ext uri="{FF2B5EF4-FFF2-40B4-BE49-F238E27FC236}">
+                  <a16:creationId xmlns:a16="http://schemas.microsoft.com/office/drawing/2014/main" id="{4C812636-A4FB-E46F-694E-EE55083C9D34}"/>
+                </a:ext>
+              </a:extLst>
+            </p:cNvPr>
+            <p:cNvSpPr txBox="1"/>
+            <p:nvPr/>
+          </p:nvSpPr>
+          <p:spPr>
+            <a:xfrm>
+              <a:off x="6653058" y="732502"/>
+              <a:ext cx="3069410" cy="461665"/>
+            </a:xfrm>
+            <a:prstGeom prst="rect">
+              <a:avLst/>
+            </a:prstGeom>
+            <a:noFill/>
+          </p:spPr>
+          <p:txBody>
+            <a:bodyPr wrap="square">
+              <a:spAutoFit/>
+            </a:bodyPr>
+            <a:lstStyle/>
+            <a:p>
+              <a:pPr algn="just"/>
+              <a:r>
+                <a:rPr lang="en-GB" sz="2400" b="1" i="0" u="sng" strike="noStrike" baseline="0" dirty="0">
+                  <a:solidFill>
+                    <a:srgbClr val="FF0000"/>
+                  </a:solidFill>
+                  <a:latin typeface="Times New Roman" panose="02020603050405020304" pitchFamily="18" charset="0"/>
+                </a:rPr>
+                <a:t>Micro-scale</a:t>
+              </a:r>
+              <a:r>
+                <a:rPr lang="en-GB" sz="1800" b="1" i="0" u="sng" strike="noStrike" baseline="0" dirty="0">
+                  <a:solidFill>
+                    <a:srgbClr val="000000"/>
+                  </a:solidFill>
+                  <a:latin typeface="Times New Roman" panose="02020603050405020304" pitchFamily="18" charset="0"/>
+                </a:rPr>
+                <a:t> phase-field</a:t>
+              </a:r>
+              <a:endParaRPr lang="LID4096" dirty="0"/>
+            </a:p>
+          </p:txBody>
+        </p:sp>
+      </p:grpSp>
+      <p:sp>
+        <p:nvSpPr>
+          <p:cNvPr id="17" name="Arrow: Right 16">
+            <a:extLst>
+              <a:ext uri="{FF2B5EF4-FFF2-40B4-BE49-F238E27FC236}">
+                <a16:creationId xmlns:a16="http://schemas.microsoft.com/office/drawing/2014/main" id="{0D99E177-98AB-1609-405B-9D306F0BC69F}"/>
+              </a:ext>
+            </a:extLst>
+          </p:cNvPr>
+          <p:cNvSpPr/>
+          <p:nvPr/>
+        </p:nvSpPr>
+        <p:spPr>
+          <a:xfrm rot="19318681">
+            <a:off x="5533143" y="5799629"/>
+            <a:ext cx="426720" cy="338895"/>
+          </a:xfrm>
+          <a:prstGeom prst="rightArrow">
+            <a:avLst/>
+          </a:prstGeom>
+        </p:spPr>
+        <p:style>
+          <a:lnRef idx="2">
+            <a:schemeClr val="accent1">
+              <a:shade val="15000"/>
+            </a:schemeClr>
+          </a:lnRef>
+          <a:fillRef idx="1">
+            <a:schemeClr val="accent1"/>
+          </a:fillRef>
+          <a:effectRef idx="0">
+            <a:schemeClr val="accent1"/>
+          </a:effectRef>
+          <a:fontRef idx="minor">
+            <a:schemeClr val="lt1"/>
+          </a:fontRef>
+        </p:style>
+        <p:txBody>
+          <a:bodyPr rtlCol="0" anchor="ctr"/>
+          <a:lstStyle/>
+          <a:p>
+            <a:pPr algn="ctr"/>
+            <a:endParaRPr lang="LID4096"/>
+          </a:p>
+        </p:txBody>
+      </p:sp>
+      <p:sp>
+        <p:nvSpPr>
+          <p:cNvPr id="31" name="TextBox 30">
+            <a:extLst>
+              <a:ext uri="{FF2B5EF4-FFF2-40B4-BE49-F238E27FC236}">
+                <a16:creationId xmlns:a16="http://schemas.microsoft.com/office/drawing/2014/main" id="{24EBBB04-CED1-CA15-A508-9EEC5791E0AF}"/>
+              </a:ext>
+            </a:extLst>
+          </p:cNvPr>
+          <p:cNvSpPr txBox="1"/>
+          <p:nvPr/>
+        </p:nvSpPr>
+        <p:spPr>
+          <a:xfrm>
+            <a:off x="4578282" y="894272"/>
+            <a:ext cx="2943995" cy="1015663"/>
+          </a:xfrm>
+          <a:prstGeom prst="rect">
+            <a:avLst/>
+          </a:prstGeom>
+          <a:noFill/>
+        </p:spPr>
+        <p:txBody>
+          <a:bodyPr wrap="square">
+            <a:spAutoFit/>
+          </a:bodyPr>
+          <a:lstStyle/>
+          <a:p>
+            <a:r>
+              <a:rPr lang="en-GB" sz="2400" b="1" i="0" u="sng" strike="noStrike" baseline="0" dirty="0">
+                <a:solidFill>
+                  <a:srgbClr val="FF0000"/>
+                </a:solidFill>
+                <a:latin typeface="Times New Roman" panose="02020603050405020304" pitchFamily="18" charset="0"/>
+              </a:rPr>
+              <a:t>Meso-scale</a:t>
+            </a:r>
+            <a:r>
+              <a:rPr lang="en-GB" sz="1800" b="1" i="0" u="sng" strike="noStrike" baseline="0" dirty="0">
+                <a:solidFill>
+                  <a:srgbClr val="000000"/>
+                </a:solidFill>
+                <a:latin typeface="Times New Roman" panose="02020603050405020304" pitchFamily="18" charset="0"/>
+              </a:rPr>
+              <a:t> models</a:t>
+            </a:r>
+            <a:r>
+              <a:rPr lang="en-GB" sz="1800" b="0" i="0" u="none" strike="noStrike" baseline="0" dirty="0">
+                <a:solidFill>
+                  <a:srgbClr val="000000"/>
+                </a:solidFill>
+                <a:latin typeface="Times New Roman" panose="02020603050405020304" pitchFamily="18" charset="0"/>
+              </a:rPr>
+              <a:t> </a:t>
+            </a:r>
+          </a:p>
+          <a:p>
+            <a:r>
+              <a:rPr lang="en-GB" sz="1800" b="0" i="0" u="none" strike="noStrike" baseline="0" dirty="0">
+                <a:solidFill>
+                  <a:srgbClr val="000000"/>
+                </a:solidFill>
+                <a:latin typeface="Times New Roman" panose="02020603050405020304" pitchFamily="18" charset="0"/>
+              </a:rPr>
+              <a:t>pool geometry, bead formation, and dilution. </a:t>
+            </a:r>
+            <a:endParaRPr lang="LID4096" dirty="0"/>
+          </a:p>
+        </p:txBody>
+      </p:sp>
+      <p:cxnSp>
+        <p:nvCxnSpPr>
+          <p:cNvPr id="32" name="Straight Connector 31">
+            <a:extLst>
+              <a:ext uri="{FF2B5EF4-FFF2-40B4-BE49-F238E27FC236}">
+                <a16:creationId xmlns:a16="http://schemas.microsoft.com/office/drawing/2014/main" id="{CA6E7739-B156-5FE7-31E7-3EC340D9E0CF}"/>
+              </a:ext>
+            </a:extLst>
+          </p:cNvPr>
+          <p:cNvCxnSpPr>
+            <a:cxnSpLocks/>
+          </p:cNvCxnSpPr>
+          <p:nvPr/>
+        </p:nvCxnSpPr>
+        <p:spPr>
+          <a:xfrm>
+            <a:off x="4154277" y="547276"/>
+            <a:ext cx="0" cy="1371600"/>
+          </a:xfrm>
+          <a:prstGeom prst="line">
+            <a:avLst/>
+          </a:prstGeom>
+          <a:ln>
+            <a:solidFill>
+              <a:schemeClr val="tx1"/>
+            </a:solidFill>
+          </a:ln>
+          <a:effectLst>
+            <a:outerShdw blurRad="50800" dist="38100" dir="8100000" algn="tr" rotWithShape="0">
+              <a:prstClr val="black">
+                <a:alpha val="40000"/>
+              </a:prstClr>
+            </a:outerShdw>
+          </a:effectLst>
+        </p:spPr>
+        <p:style>
+          <a:lnRef idx="1">
+            <a:schemeClr val="accent1"/>
+          </a:lnRef>
+          <a:fillRef idx="0">
+            <a:schemeClr val="accent1"/>
+          </a:fillRef>
+          <a:effectRef idx="0">
+            <a:schemeClr val="accent1"/>
+          </a:effectRef>
+          <a:fontRef idx="minor">
+            <a:schemeClr val="tx1"/>
+          </a:fontRef>
+        </p:style>
+      </p:cxnSp>
+      <p:cxnSp>
+        <p:nvCxnSpPr>
+          <p:cNvPr id="33" name="Straight Connector 32">
+            <a:extLst>
+              <a:ext uri="{FF2B5EF4-FFF2-40B4-BE49-F238E27FC236}">
+                <a16:creationId xmlns:a16="http://schemas.microsoft.com/office/drawing/2014/main" id="{62973B47-50DE-DA68-A410-F1ABE21EDF32}"/>
+              </a:ext>
+            </a:extLst>
+          </p:cNvPr>
+          <p:cNvCxnSpPr>
+            <a:cxnSpLocks/>
+          </p:cNvCxnSpPr>
+          <p:nvPr/>
+        </p:nvCxnSpPr>
+        <p:spPr>
+          <a:xfrm>
+            <a:off x="7692476" y="547275"/>
+            <a:ext cx="0" cy="1371600"/>
+          </a:xfrm>
+          <a:prstGeom prst="line">
+            <a:avLst/>
+          </a:prstGeom>
+          <a:ln>
+            <a:solidFill>
+              <a:schemeClr val="tx1"/>
+            </a:solidFill>
+          </a:ln>
+          <a:effectLst>
+            <a:outerShdw blurRad="50800" dist="38100" dir="8100000" algn="tr" rotWithShape="0">
+              <a:prstClr val="black">
+                <a:alpha val="40000"/>
+              </a:prstClr>
+            </a:outerShdw>
+          </a:effectLst>
+        </p:spPr>
+        <p:style>
+          <a:lnRef idx="1">
+            <a:schemeClr val="accent1"/>
+          </a:lnRef>
+          <a:fillRef idx="0">
+            <a:schemeClr val="accent1"/>
+          </a:fillRef>
+          <a:effectRef idx="0">
+            <a:schemeClr val="accent1"/>
+          </a:effectRef>
+          <a:fontRef idx="minor">
+            <a:schemeClr val="tx1"/>
+          </a:fontRef>
+        </p:style>
+      </p:cxnSp>
+      <p:cxnSp>
+        <p:nvCxnSpPr>
+          <p:cNvPr id="34" name="Straight Connector 33">
+            <a:extLst>
+              <a:ext uri="{FF2B5EF4-FFF2-40B4-BE49-F238E27FC236}">
+                <a16:creationId xmlns:a16="http://schemas.microsoft.com/office/drawing/2014/main" id="{4C115BA8-7EB1-9D87-ECF4-114E0CA95B6D}"/>
+              </a:ext>
+            </a:extLst>
+          </p:cNvPr>
+          <p:cNvCxnSpPr>
+            <a:cxnSpLocks/>
+          </p:cNvCxnSpPr>
+          <p:nvPr/>
+        </p:nvCxnSpPr>
+        <p:spPr>
+          <a:xfrm>
+            <a:off x="4154277" y="4618534"/>
+            <a:ext cx="0" cy="1371600"/>
+          </a:xfrm>
+          <a:prstGeom prst="line">
+            <a:avLst/>
+          </a:prstGeom>
+          <a:ln>
+            <a:solidFill>
+              <a:schemeClr val="tx1"/>
+            </a:solidFill>
+          </a:ln>
+          <a:effectLst>
+            <a:outerShdw blurRad="50800" dist="38100" dir="8100000" algn="tr" rotWithShape="0">
+              <a:prstClr val="black">
+                <a:alpha val="40000"/>
+              </a:prstClr>
+            </a:outerShdw>
+          </a:effectLst>
+        </p:spPr>
+        <p:style>
+          <a:lnRef idx="1">
+            <a:schemeClr val="accent1"/>
+          </a:lnRef>
+          <a:fillRef idx="0">
+            <a:schemeClr val="accent1"/>
+          </a:fillRef>
+          <a:effectRef idx="0">
+            <a:schemeClr val="accent1"/>
+          </a:effectRef>
+          <a:fontRef idx="minor">
+            <a:schemeClr val="tx1"/>
+          </a:fontRef>
+        </p:style>
+      </p:cxnSp>
+      <p:cxnSp>
+        <p:nvCxnSpPr>
+          <p:cNvPr id="35" name="Straight Connector 34">
+            <a:extLst>
+              <a:ext uri="{FF2B5EF4-FFF2-40B4-BE49-F238E27FC236}">
+                <a16:creationId xmlns:a16="http://schemas.microsoft.com/office/drawing/2014/main" id="{C632C9D7-49BC-51C2-3E0C-82CDC84270CC}"/>
+              </a:ext>
+            </a:extLst>
+          </p:cNvPr>
+          <p:cNvCxnSpPr>
+            <a:cxnSpLocks/>
+          </p:cNvCxnSpPr>
+          <p:nvPr/>
+        </p:nvCxnSpPr>
+        <p:spPr>
+          <a:xfrm>
+            <a:off x="7692476" y="4618533"/>
+            <a:ext cx="0" cy="1371600"/>
+          </a:xfrm>
+          <a:prstGeom prst="line">
+            <a:avLst/>
+          </a:prstGeom>
+          <a:ln>
+            <a:solidFill>
+              <a:schemeClr val="tx1"/>
+            </a:solidFill>
+          </a:ln>
+          <a:effectLst>
+            <a:outerShdw blurRad="50800" dist="38100" dir="8100000" algn="tr" rotWithShape="0">
+              <a:prstClr val="black">
+                <a:alpha val="40000"/>
+              </a:prstClr>
+            </a:outerShdw>
+          </a:effectLst>
+        </p:spPr>
+        <p:style>
+          <a:lnRef idx="1">
+            <a:schemeClr val="accent1"/>
+          </a:lnRef>
+          <a:fillRef idx="0">
+            <a:schemeClr val="accent1"/>
+          </a:fillRef>
+          <a:effectRef idx="0">
+            <a:schemeClr val="accent1"/>
+          </a:effectRef>
+          <a:fontRef idx="minor">
+            <a:schemeClr val="tx1"/>
+          </a:fontRef>
+        </p:style>
+      </p:cxnSp>
+    </p:spTree>
+    <p:extLst>
+      <p:ext uri="{BB962C8B-B14F-4D97-AF65-F5344CB8AC3E}">
+        <p14:creationId xmlns:p14="http://schemas.microsoft.com/office/powerpoint/2010/main" val="3961323624"/>
+      </p:ext>
+    </p:extLst>
+  </p:cSld>
+  <p:clrMapOvr>
+    <a:masterClrMapping/>
+  </p:clrMapOvr>
+</p:sld>
+</file>
+
 <file path=ppt/slides/slide6.xml><?xml version="1.0" encoding="utf-8"?>
 <p:sld xmlns:a="http://schemas.openxmlformats.org/drawingml/2006/main" xmlns:r="http://schemas.openxmlformats.org/officeDocument/2006/relationships" xmlns:p="http://schemas.openxmlformats.org/presentationml/2006/main">
   <p:cSld>
@@ -9672,8 +9711,8 @@
         </p:nvSpPr>
         <p:spPr>
           <a:xfrm>
-            <a:off x="176158" y="1067336"/>
-            <a:ext cx="2057282" cy="646331"/>
+            <a:off x="275969" y="4516965"/>
+            <a:ext cx="2725133" cy="369332"/>
           </a:xfrm>
           <a:prstGeom prst="rect">
             <a:avLst/>
@@ -9757,7 +9796,7 @@
         </p:nvSpPr>
         <p:spPr>
           <a:xfrm>
-            <a:off x="7705601" y="4206507"/>
+            <a:off x="7705601" y="3925852"/>
             <a:ext cx="2579040" cy="461665"/>
           </a:xfrm>
           <a:prstGeom prst="rect">
@@ -9798,7 +9837,7 @@
         </p:nvCxnSpPr>
         <p:spPr>
           <a:xfrm flipH="1" flipV="1">
-            <a:off x="7443049" y="3906693"/>
+            <a:off x="7443049" y="3644143"/>
             <a:ext cx="4426734" cy="338"/>
           </a:xfrm>
           <a:prstGeom prst="line">
@@ -9846,7 +9885,7 @@
         </p:nvSpPr>
         <p:spPr>
           <a:xfrm>
-            <a:off x="8031678" y="4533887"/>
+            <a:off x="8031678" y="4253232"/>
             <a:ext cx="3137293" cy="369332"/>
           </a:xfrm>
           <a:prstGeom prst="rect">
@@ -9896,7 +9935,7 @@
         </p:nvSpPr>
         <p:spPr>
           <a:xfrm>
-            <a:off x="8043697" y="5052164"/>
+            <a:off x="8043697" y="4771509"/>
             <a:ext cx="3277703" cy="923330"/>
           </a:xfrm>
           <a:prstGeom prst="rect">
@@ -9944,7 +9983,7 @@
         </p:nvSpPr>
         <p:spPr>
           <a:xfrm>
-            <a:off x="9439217" y="6127210"/>
+            <a:off x="9439217" y="5846555"/>
             <a:ext cx="1690847" cy="369332"/>
           </a:xfrm>
           <a:prstGeom prst="rect">
@@ -9988,7 +10027,7 @@
         </p:nvSpPr>
         <p:spPr>
           <a:xfrm>
-            <a:off x="7951350" y="5988710"/>
+            <a:off x="7951350" y="5708055"/>
             <a:ext cx="1606811" cy="646331"/>
           </a:xfrm>
           <a:prstGeom prst="rect">
@@ -10020,6 +10059,69 @@
               </a:rPr>
               <a:t>particle-based</a:t>
             </a:r>
+          </a:p>
+        </p:txBody>
+      </p:sp>
+      <p:sp>
+        <p:nvSpPr>
+          <p:cNvPr id="7" name="Rectangle: Rounded Corners 6">
+            <a:extLst>
+              <a:ext uri="{FF2B5EF4-FFF2-40B4-BE49-F238E27FC236}">
+                <a16:creationId xmlns:a16="http://schemas.microsoft.com/office/drawing/2014/main" id="{A1C09256-4C1E-62D9-E0A7-A0C3AC614B27}"/>
+              </a:ext>
+            </a:extLst>
+          </p:cNvPr>
+          <p:cNvSpPr/>
+          <p:nvPr/>
+        </p:nvSpPr>
+        <p:spPr>
+          <a:xfrm>
+            <a:off x="407405" y="1852989"/>
+            <a:ext cx="2034833" cy="289713"/>
+          </a:xfrm>
+          <a:prstGeom prst="roundRect">
+            <a:avLst/>
+          </a:prstGeom>
+          <a:solidFill>
+            <a:schemeClr val="bg1"/>
+          </a:solidFill>
+        </p:spPr>
+        <p:txBody>
+          <a:bodyPr wrap="square" lIns="0" tIns="0" rIns="0" bIns="0" anchor="ctr" anchorCtr="0">
+            <a:noAutofit/>
+          </a:bodyPr>
+          <a:lstStyle/>
+          <a:p>
+            <a:pPr algn="ctr"/>
+            <a:r>
+              <a:rPr lang="pt-BR" sz="2000" b="1" dirty="0">
+                <a:solidFill>
+                  <a:srgbClr val="0000FF"/>
+                </a:solidFill>
+                <a:effectLst>
+                  <a:outerShdw blurRad="38100" dist="38100" dir="2700000" algn="tl">
+                    <a:srgbClr val="000000">
+                      <a:alpha val="43137"/>
+                    </a:srgbClr>
+                  </a:outerShdw>
+                </a:effectLst>
+                <a:latin typeface="Horley Old Style MT"/>
+              </a:rPr>
+              <a:t>Particle based</a:t>
+            </a:r>
+            <a:endParaRPr lang="LID4096" sz="2000" b="1" dirty="0">
+              <a:solidFill>
+                <a:srgbClr val="0000FF"/>
+              </a:solidFill>
+              <a:effectLst>
+                <a:outerShdw blurRad="38100" dist="38100" dir="2700000" algn="tl">
+                  <a:srgbClr val="000000">
+                    <a:alpha val="43137"/>
+                  </a:srgbClr>
+                </a:outerShdw>
+              </a:effectLst>
+              <a:latin typeface="Horley Old Style MT"/>
+            </a:endParaRPr>
           </a:p>
         </p:txBody>
       </p:sp>
@@ -10059,6 +10161,770 @@
           <a:chExt cx="0" cy="0"/>
         </a:xfrm>
       </p:grpSpPr>
+      <p:sp>
+        <p:nvSpPr>
+          <p:cNvPr id="3" name="TextBox 2">
+            <a:extLst>
+              <a:ext uri="{FF2B5EF4-FFF2-40B4-BE49-F238E27FC236}">
+                <a16:creationId xmlns:a16="http://schemas.microsoft.com/office/drawing/2014/main" id="{5F689BD5-7F8D-3E07-9C24-2FB7427632BD}"/>
+              </a:ext>
+            </a:extLst>
+          </p:cNvPr>
+          <p:cNvSpPr txBox="1"/>
+          <p:nvPr/>
+        </p:nvSpPr>
+        <p:spPr>
+          <a:xfrm>
+            <a:off x="326574" y="1742881"/>
+            <a:ext cx="5664926" cy="1015663"/>
+          </a:xfrm>
+          <a:prstGeom prst="rect">
+            <a:avLst/>
+          </a:prstGeom>
+          <a:noFill/>
+        </p:spPr>
+        <p:txBody>
+          <a:bodyPr wrap="square">
+            <a:spAutoFit/>
+          </a:bodyPr>
+          <a:lstStyle/>
+          <a:p>
+            <a:pPr marL="342900" indent="-342900">
+              <a:buFont typeface="Wingdings" panose="05000000000000000000" pitchFamily="2" charset="2"/>
+              <a:buChar char="Ø"/>
+            </a:pPr>
+            <a:r>
+              <a:rPr lang="LID4096" sz="2000" b="1" dirty="0"/>
+              <a:t>insight into the solute transport process</a:t>
+            </a:r>
+            <a:r>
+              <a:rPr lang="pt-BR" sz="2000" b="1" dirty="0"/>
+              <a:t>;</a:t>
+            </a:r>
+          </a:p>
+          <a:p>
+            <a:pPr marL="342900" indent="-342900">
+              <a:buFont typeface="Wingdings" panose="05000000000000000000" pitchFamily="2" charset="2"/>
+              <a:buChar char="Ø"/>
+            </a:pPr>
+            <a:r>
+              <a:rPr lang="en-US" sz="2000" b="1" dirty="0"/>
+              <a:t>high-fidelity physics-based numerical modelling;</a:t>
+            </a:r>
+            <a:endParaRPr lang="LID4096" sz="2000" b="1" dirty="0"/>
+          </a:p>
+          <a:p>
+            <a:pPr marL="342900" indent="-342900">
+              <a:buFont typeface="Wingdings" panose="05000000000000000000" pitchFamily="2" charset="2"/>
+              <a:buChar char="Ø"/>
+            </a:pPr>
+            <a:r>
+              <a:rPr lang="en-GB" sz="2000" b="1" dirty="0"/>
+              <a:t>effect of melt convection and solute partition.</a:t>
+            </a:r>
+            <a:endParaRPr lang="LID4096" sz="2000" b="1" dirty="0"/>
+          </a:p>
+        </p:txBody>
+      </p:sp>
+      <p:pic>
+        <p:nvPicPr>
+          <p:cNvPr id="11" name="Picture 10">
+            <a:extLst>
+              <a:ext uri="{FF2B5EF4-FFF2-40B4-BE49-F238E27FC236}">
+                <a16:creationId xmlns:a16="http://schemas.microsoft.com/office/drawing/2014/main" id="{58865A81-25FD-EFFC-EE19-89AA21692860}"/>
+              </a:ext>
+            </a:extLst>
+          </p:cNvPr>
+          <p:cNvPicPr>
+            <a:picLocks noChangeAspect="1"/>
+          </p:cNvPicPr>
+          <p:nvPr/>
+        </p:nvPicPr>
+        <p:blipFill>
+          <a:blip r:embed="rId2"/>
+          <a:stretch>
+            <a:fillRect/>
+          </a:stretch>
+        </p:blipFill>
+        <p:spPr>
+          <a:xfrm>
+            <a:off x="326574" y="239486"/>
+            <a:ext cx="4295542" cy="1360750"/>
+          </a:xfrm>
+          <a:prstGeom prst="rect">
+            <a:avLst/>
+          </a:prstGeom>
+          <a:ln>
+            <a:solidFill>
+              <a:schemeClr val="tx1"/>
+            </a:solidFill>
+          </a:ln>
+          <a:effectLst>
+            <a:outerShdw blurRad="50800" dist="38100" dir="8100000" algn="tr" rotWithShape="0">
+              <a:prstClr val="black">
+                <a:alpha val="40000"/>
+              </a:prstClr>
+            </a:outerShdw>
+          </a:effectLst>
+        </p:spPr>
+      </p:pic>
+      <p:sp>
+        <p:nvSpPr>
+          <p:cNvPr id="14" name="TextBox 13">
+            <a:extLst>
+              <a:ext uri="{FF2B5EF4-FFF2-40B4-BE49-F238E27FC236}">
+                <a16:creationId xmlns:a16="http://schemas.microsoft.com/office/drawing/2014/main" id="{04895958-1321-34DA-5B5D-A7B298E0B9D9}"/>
+              </a:ext>
+            </a:extLst>
+          </p:cNvPr>
+          <p:cNvSpPr txBox="1"/>
+          <p:nvPr/>
+        </p:nvSpPr>
+        <p:spPr>
+          <a:xfrm>
+            <a:off x="2950026" y="5118198"/>
+            <a:ext cx="3154683" cy="1323439"/>
+          </a:xfrm>
+          <a:prstGeom prst="rect">
+            <a:avLst/>
+          </a:prstGeom>
+          <a:noFill/>
+        </p:spPr>
+        <p:txBody>
+          <a:bodyPr wrap="square">
+            <a:spAutoFit/>
+          </a:bodyPr>
+          <a:lstStyle/>
+          <a:p>
+            <a:r>
+              <a:rPr lang="LID4096" sz="2000" dirty="0">
+                <a:solidFill>
+                  <a:srgbClr val="0000FF"/>
+                </a:solidFill>
+              </a:rPr>
+              <a:t>Temperature,</a:t>
+            </a:r>
+            <a:r>
+              <a:rPr lang="pt-BR" sz="2000" dirty="0">
+                <a:solidFill>
+                  <a:srgbClr val="0000FF"/>
+                </a:solidFill>
+              </a:rPr>
+              <a:t> </a:t>
+            </a:r>
+            <a:r>
+              <a:rPr lang="LID4096" sz="2000" dirty="0">
+                <a:solidFill>
+                  <a:srgbClr val="0000FF"/>
+                </a:solidFill>
+              </a:rPr>
+              <a:t>flow velocity, solute concentration, and microstructure are</a:t>
+            </a:r>
+            <a:r>
+              <a:rPr lang="pt-BR" sz="2000" dirty="0">
+                <a:solidFill>
+                  <a:srgbClr val="0000FF"/>
+                </a:solidFill>
+              </a:rPr>
+              <a:t> </a:t>
+            </a:r>
+            <a:r>
+              <a:rPr lang="LID4096" sz="2000" dirty="0">
+                <a:solidFill>
+                  <a:srgbClr val="0000FF"/>
+                </a:solidFill>
+              </a:rPr>
+              <a:t>directly coupled with each other</a:t>
+            </a:r>
+          </a:p>
+        </p:txBody>
+      </p:sp>
+      <p:sp>
+        <p:nvSpPr>
+          <p:cNvPr id="16" name="TextBox 15">
+            <a:extLst>
+              <a:ext uri="{FF2B5EF4-FFF2-40B4-BE49-F238E27FC236}">
+                <a16:creationId xmlns:a16="http://schemas.microsoft.com/office/drawing/2014/main" id="{2FA1F596-C0A1-D18B-4C5E-F58FDD4668E1}"/>
+              </a:ext>
+            </a:extLst>
+          </p:cNvPr>
+          <p:cNvSpPr txBox="1"/>
+          <p:nvPr/>
+        </p:nvSpPr>
+        <p:spPr>
+          <a:xfrm>
+            <a:off x="1780905" y="251368"/>
+            <a:ext cx="2242458" cy="400110"/>
+          </a:xfrm>
+          <a:prstGeom prst="rect">
+            <a:avLst/>
+          </a:prstGeom>
+          <a:noFill/>
+        </p:spPr>
+        <p:txBody>
+          <a:bodyPr wrap="square">
+            <a:spAutoFit/>
+          </a:bodyPr>
+          <a:lstStyle>
+            <a:defPPr>
+              <a:defRPr lang="LID4096"/>
+            </a:defPPr>
+            <a:lvl1pPr algn="ctr">
+              <a:defRPr sz="2000">
+                <a:solidFill>
+                  <a:srgbClr val="0000FF"/>
+                </a:solidFill>
+              </a:defRPr>
+            </a:lvl1pPr>
+          </a:lstStyle>
+          <a:p>
+            <a:r>
+              <a:rPr lang="en-GB" b="1" noProof="0" dirty="0">
+                <a:solidFill>
+                  <a:srgbClr val="FF0000"/>
+                </a:solidFill>
+              </a:rPr>
+              <a:t>Micro-scale</a:t>
+            </a:r>
+          </a:p>
+        </p:txBody>
+      </p:sp>
+      <p:sp>
+        <p:nvSpPr>
+          <p:cNvPr id="18" name="TextBox 17">
+            <a:extLst>
+              <a:ext uri="{FF2B5EF4-FFF2-40B4-BE49-F238E27FC236}">
+                <a16:creationId xmlns:a16="http://schemas.microsoft.com/office/drawing/2014/main" id="{DF613F02-D1CC-C2FD-E558-4F90E83774E5}"/>
+              </a:ext>
+            </a:extLst>
+          </p:cNvPr>
+          <p:cNvSpPr txBox="1"/>
+          <p:nvPr/>
+        </p:nvSpPr>
+        <p:spPr>
+          <a:xfrm>
+            <a:off x="10118272" y="5170775"/>
+            <a:ext cx="1502231" cy="1323439"/>
+          </a:xfrm>
+          <a:prstGeom prst="rect">
+            <a:avLst/>
+          </a:prstGeom>
+          <a:noFill/>
+        </p:spPr>
+        <p:txBody>
+          <a:bodyPr wrap="square">
+            <a:spAutoFit/>
+          </a:bodyPr>
+          <a:lstStyle/>
+          <a:p>
+            <a:pPr algn="r"/>
+            <a:r>
+              <a:rPr lang="LID4096" sz="1600" dirty="0"/>
+              <a:t>210 ×</a:t>
+            </a:r>
+            <a:r>
+              <a:rPr lang="pt-BR" sz="1600" dirty="0"/>
+              <a:t> </a:t>
+            </a:r>
+            <a:r>
+              <a:rPr lang="LID4096" sz="1600" dirty="0"/>
+              <a:t>400 µm computational domain</a:t>
+            </a:r>
+            <a:r>
+              <a:rPr lang="pt-BR" sz="1600" dirty="0"/>
+              <a:t> (2D)</a:t>
+            </a:r>
+          </a:p>
+          <a:p>
+            <a:pPr algn="r"/>
+            <a:r>
+              <a:rPr lang="en-GB" sz="1600" dirty="0">
+                <a:latin typeface="AdvOTdd63dae3"/>
+              </a:rPr>
+              <a:t>1,341,561 </a:t>
+            </a:r>
+          </a:p>
+          <a:p>
+            <a:pPr algn="r"/>
+            <a:r>
+              <a:rPr lang="en-GB" sz="1600" dirty="0">
+                <a:latin typeface="AdvOTdd63dae3"/>
+              </a:rPr>
+              <a:t>grid 0.25 </a:t>
+            </a:r>
+            <a:r>
+              <a:rPr lang="en-GB" sz="1600" dirty="0" err="1">
+                <a:latin typeface="AdvOTdd63dae3+03"/>
+              </a:rPr>
+              <a:t>μ</a:t>
+            </a:r>
+            <a:r>
+              <a:rPr lang="en-GB" sz="1600" dirty="0" err="1">
+                <a:latin typeface="AdvOTdd63dae3"/>
+              </a:rPr>
+              <a:t>m</a:t>
+            </a:r>
+            <a:endParaRPr lang="LID4096" sz="1600" dirty="0"/>
+          </a:p>
+        </p:txBody>
+      </p:sp>
+      <p:pic>
+        <p:nvPicPr>
+          <p:cNvPr id="22" name="Picture 21">
+            <a:extLst>
+              <a:ext uri="{FF2B5EF4-FFF2-40B4-BE49-F238E27FC236}">
+                <a16:creationId xmlns:a16="http://schemas.microsoft.com/office/drawing/2014/main" id="{E93FDDD3-7330-406D-9099-4460C47A9364}"/>
+              </a:ext>
+            </a:extLst>
+          </p:cNvPr>
+          <p:cNvPicPr>
+            <a:picLocks noChangeAspect="1"/>
+          </p:cNvPicPr>
+          <p:nvPr/>
+        </p:nvPicPr>
+        <p:blipFill>
+          <a:blip r:embed="rId3"/>
+          <a:srcRect l="45717" b="60600"/>
+          <a:stretch>
+            <a:fillRect/>
+          </a:stretch>
+        </p:blipFill>
+        <p:spPr>
+          <a:xfrm>
+            <a:off x="6457406" y="239487"/>
+            <a:ext cx="5222966" cy="1885406"/>
+          </a:xfrm>
+          <a:prstGeom prst="rect">
+            <a:avLst/>
+          </a:prstGeom>
+          <a:ln>
+            <a:solidFill>
+              <a:schemeClr val="tx1"/>
+            </a:solidFill>
+          </a:ln>
+          <a:effectLst>
+            <a:outerShdw blurRad="50800" dist="38100" dir="8100000" algn="tr" rotWithShape="0">
+              <a:prstClr val="black">
+                <a:alpha val="40000"/>
+              </a:prstClr>
+            </a:outerShdw>
+          </a:effectLst>
+        </p:spPr>
+      </p:pic>
+      <p:pic>
+        <p:nvPicPr>
+          <p:cNvPr id="23" name="Picture 22">
+            <a:extLst>
+              <a:ext uri="{FF2B5EF4-FFF2-40B4-BE49-F238E27FC236}">
+                <a16:creationId xmlns:a16="http://schemas.microsoft.com/office/drawing/2014/main" id="{9E9D78FC-A9F0-161A-B5C7-ABA7352AFC84}"/>
+              </a:ext>
+            </a:extLst>
+          </p:cNvPr>
+          <p:cNvPicPr>
+            <a:picLocks noChangeAspect="1"/>
+          </p:cNvPicPr>
+          <p:nvPr/>
+        </p:nvPicPr>
+        <p:blipFill>
+          <a:blip r:embed="rId3"/>
+          <a:srcRect l="5748" t="9050" r="67184" b="66061"/>
+          <a:stretch>
+            <a:fillRect/>
+          </a:stretch>
+        </p:blipFill>
+        <p:spPr>
+          <a:xfrm>
+            <a:off x="322216" y="3019053"/>
+            <a:ext cx="2420984" cy="1107142"/>
+          </a:xfrm>
+          <a:prstGeom prst="rect">
+            <a:avLst/>
+          </a:prstGeom>
+          <a:ln>
+            <a:solidFill>
+              <a:schemeClr val="tx1"/>
+            </a:solidFill>
+          </a:ln>
+          <a:effectLst>
+            <a:outerShdw blurRad="50800" dist="38100" dir="8100000" algn="tr" rotWithShape="0">
+              <a:prstClr val="black">
+                <a:alpha val="40000"/>
+              </a:prstClr>
+            </a:outerShdw>
+          </a:effectLst>
+        </p:spPr>
+      </p:pic>
+      <p:pic>
+        <p:nvPicPr>
+          <p:cNvPr id="24" name="Picture 23">
+            <a:extLst>
+              <a:ext uri="{FF2B5EF4-FFF2-40B4-BE49-F238E27FC236}">
+                <a16:creationId xmlns:a16="http://schemas.microsoft.com/office/drawing/2014/main" id="{D094B13F-A5E0-E8CD-CE8D-3ACAA9BB0449}"/>
+              </a:ext>
+            </a:extLst>
+          </p:cNvPr>
+          <p:cNvPicPr>
+            <a:picLocks noChangeAspect="1"/>
+          </p:cNvPicPr>
+          <p:nvPr/>
+        </p:nvPicPr>
+        <p:blipFill>
+          <a:blip r:embed="rId3"/>
+          <a:srcRect l="4946" t="48903" r="60805" b="2231"/>
+          <a:stretch>
+            <a:fillRect/>
+          </a:stretch>
+        </p:blipFill>
+        <p:spPr>
+          <a:xfrm>
+            <a:off x="2910840" y="3019053"/>
+            <a:ext cx="2524503" cy="1791368"/>
+          </a:xfrm>
+          <a:prstGeom prst="rect">
+            <a:avLst/>
+          </a:prstGeom>
+          <a:ln>
+            <a:solidFill>
+              <a:schemeClr val="tx1"/>
+            </a:solidFill>
+          </a:ln>
+          <a:effectLst>
+            <a:outerShdw blurRad="50800" dist="38100" dir="8100000" algn="tr" rotWithShape="0">
+              <a:prstClr val="black">
+                <a:alpha val="40000"/>
+              </a:prstClr>
+            </a:outerShdw>
+          </a:effectLst>
+        </p:spPr>
+      </p:pic>
+      <p:pic>
+        <p:nvPicPr>
+          <p:cNvPr id="29" name="Picture 28">
+            <a:extLst>
+              <a:ext uri="{FF2B5EF4-FFF2-40B4-BE49-F238E27FC236}">
+                <a16:creationId xmlns:a16="http://schemas.microsoft.com/office/drawing/2014/main" id="{3511BDF1-0BF2-0125-5C1A-2CF5CA835335}"/>
+              </a:ext>
+            </a:extLst>
+          </p:cNvPr>
+          <p:cNvPicPr>
+            <a:picLocks noChangeAspect="1"/>
+          </p:cNvPicPr>
+          <p:nvPr/>
+        </p:nvPicPr>
+        <p:blipFill>
+          <a:blip r:embed="rId3"/>
+          <a:srcRect l="45717" t="45003" b="4034"/>
+          <a:stretch>
+            <a:fillRect/>
+          </a:stretch>
+        </p:blipFill>
+        <p:spPr>
+          <a:xfrm>
+            <a:off x="6457406" y="2499360"/>
+            <a:ext cx="5222966" cy="2438775"/>
+          </a:xfrm>
+          <a:prstGeom prst="rect">
+            <a:avLst/>
+          </a:prstGeom>
+          <a:ln>
+            <a:solidFill>
+              <a:schemeClr val="tx1"/>
+            </a:solidFill>
+          </a:ln>
+          <a:effectLst>
+            <a:outerShdw blurRad="50800" dist="38100" dir="8100000" algn="tr" rotWithShape="0">
+              <a:prstClr val="black">
+                <a:alpha val="40000"/>
+              </a:prstClr>
+            </a:outerShdw>
+          </a:effectLst>
+        </p:spPr>
+      </p:pic>
+      <p:sp>
+        <p:nvSpPr>
+          <p:cNvPr id="30" name="TextBox 29">
+            <a:extLst>
+              <a:ext uri="{FF2B5EF4-FFF2-40B4-BE49-F238E27FC236}">
+                <a16:creationId xmlns:a16="http://schemas.microsoft.com/office/drawing/2014/main" id="{8F5D7BA6-F9DA-5A65-FB31-92FFA294A66A}"/>
+              </a:ext>
+            </a:extLst>
+          </p:cNvPr>
+          <p:cNvSpPr txBox="1"/>
+          <p:nvPr/>
+        </p:nvSpPr>
+        <p:spPr>
+          <a:xfrm>
+            <a:off x="10058405" y="317806"/>
+            <a:ext cx="1621967" cy="461665"/>
+          </a:xfrm>
+          <a:prstGeom prst="rect">
+            <a:avLst/>
+          </a:prstGeom>
+          <a:noFill/>
+        </p:spPr>
+        <p:txBody>
+          <a:bodyPr wrap="square">
+            <a:spAutoFit/>
+          </a:bodyPr>
+          <a:lstStyle>
+            <a:defPPr>
+              <a:defRPr lang="LID4096"/>
+            </a:defPPr>
+            <a:lvl1pPr algn="ctr">
+              <a:defRPr sz="2000">
+                <a:solidFill>
+                  <a:srgbClr val="0000FF"/>
+                </a:solidFill>
+              </a:defRPr>
+            </a:lvl1pPr>
+          </a:lstStyle>
+          <a:p>
+            <a:r>
+              <a:rPr lang="en-GB" sz="2400" b="1" dirty="0">
+                <a:solidFill>
+                  <a:srgbClr val="FF0000"/>
+                </a:solidFill>
+                <a:effectLst>
+                  <a:outerShdw blurRad="38100" dist="38100" dir="2700000" algn="tl">
+                    <a:srgbClr val="000000">
+                      <a:alpha val="43137"/>
+                    </a:srgbClr>
+                  </a:outerShdw>
+                </a:effectLst>
+              </a:rPr>
+              <a:t>A.M (3D)</a:t>
+            </a:r>
+            <a:endParaRPr lang="en-GB" sz="2400" b="1" noProof="0" dirty="0">
+              <a:solidFill>
+                <a:srgbClr val="FF0000"/>
+              </a:solidFill>
+              <a:effectLst>
+                <a:outerShdw blurRad="38100" dist="38100" dir="2700000" algn="tl">
+                  <a:srgbClr val="000000">
+                    <a:alpha val="43137"/>
+                  </a:srgbClr>
+                </a:outerShdw>
+              </a:effectLst>
+            </a:endParaRPr>
+          </a:p>
+        </p:txBody>
+      </p:sp>
+      <p:sp>
+        <p:nvSpPr>
+          <p:cNvPr id="31" name="TextBox 30">
+            <a:extLst>
+              <a:ext uri="{FF2B5EF4-FFF2-40B4-BE49-F238E27FC236}">
+                <a16:creationId xmlns:a16="http://schemas.microsoft.com/office/drawing/2014/main" id="{F9F1AEB8-61A7-BB22-36CA-C87A2B7D8FA8}"/>
+              </a:ext>
+            </a:extLst>
+          </p:cNvPr>
+          <p:cNvSpPr txBox="1"/>
+          <p:nvPr/>
+        </p:nvSpPr>
+        <p:spPr>
+          <a:xfrm>
+            <a:off x="10058405" y="2136078"/>
+            <a:ext cx="1495703" cy="461665"/>
+          </a:xfrm>
+          <a:prstGeom prst="rect">
+            <a:avLst/>
+          </a:prstGeom>
+          <a:noFill/>
+        </p:spPr>
+        <p:txBody>
+          <a:bodyPr wrap="square">
+            <a:spAutoFit/>
+          </a:bodyPr>
+          <a:lstStyle>
+            <a:defPPr>
+              <a:defRPr lang="LID4096"/>
+            </a:defPPr>
+            <a:lvl1pPr algn="ctr">
+              <a:defRPr sz="2000">
+                <a:solidFill>
+                  <a:srgbClr val="0000FF"/>
+                </a:solidFill>
+              </a:defRPr>
+            </a:lvl1pPr>
+          </a:lstStyle>
+          <a:p>
+            <a:r>
+              <a:rPr lang="en-GB" sz="2400" b="1" dirty="0">
+                <a:solidFill>
+                  <a:srgbClr val="FF0000"/>
+                </a:solidFill>
+                <a:effectLst>
+                  <a:outerShdw blurRad="38100" dist="38100" dir="2700000" algn="tl">
+                    <a:srgbClr val="000000">
+                      <a:alpha val="43137"/>
+                    </a:srgbClr>
+                  </a:outerShdw>
+                </a:effectLst>
+              </a:rPr>
+              <a:t>Modelo</a:t>
+            </a:r>
+            <a:endParaRPr lang="en-GB" sz="2400" b="1" noProof="0" dirty="0">
+              <a:solidFill>
+                <a:srgbClr val="FF0000"/>
+              </a:solidFill>
+              <a:effectLst>
+                <a:outerShdw blurRad="38100" dist="38100" dir="2700000" algn="tl">
+                  <a:srgbClr val="000000">
+                    <a:alpha val="43137"/>
+                  </a:srgbClr>
+                </a:outerShdw>
+              </a:effectLst>
+            </a:endParaRPr>
+          </a:p>
+        </p:txBody>
+      </p:sp>
+      <p:pic>
+        <p:nvPicPr>
+          <p:cNvPr id="33" name="Picture 32">
+            <a:extLst>
+              <a:ext uri="{FF2B5EF4-FFF2-40B4-BE49-F238E27FC236}">
+                <a16:creationId xmlns:a16="http://schemas.microsoft.com/office/drawing/2014/main" id="{2A2FEBC7-5E88-737D-62CE-9613783756C1}"/>
+              </a:ext>
+            </a:extLst>
+          </p:cNvPr>
+          <p:cNvPicPr>
+            <a:picLocks noChangeAspect="1"/>
+          </p:cNvPicPr>
+          <p:nvPr/>
+        </p:nvPicPr>
+        <p:blipFill>
+          <a:blip r:embed="rId4"/>
+          <a:stretch>
+            <a:fillRect/>
+          </a:stretch>
+        </p:blipFill>
+        <p:spPr>
+          <a:xfrm>
+            <a:off x="327767" y="4268840"/>
+            <a:ext cx="2402948" cy="2079709"/>
+          </a:xfrm>
+          <a:prstGeom prst="rect">
+            <a:avLst/>
+          </a:prstGeom>
+          <a:ln>
+            <a:solidFill>
+              <a:schemeClr val="tx1"/>
+            </a:solidFill>
+          </a:ln>
+          <a:effectLst>
+            <a:outerShdw blurRad="50800" dist="38100" dir="8100000" algn="tr" rotWithShape="0">
+              <a:prstClr val="black">
+                <a:alpha val="40000"/>
+              </a:prstClr>
+            </a:outerShdw>
+          </a:effectLst>
+        </p:spPr>
+      </p:pic>
+      <p:pic>
+        <p:nvPicPr>
+          <p:cNvPr id="35" name="Picture 34">
+            <a:extLst>
+              <a:ext uri="{FF2B5EF4-FFF2-40B4-BE49-F238E27FC236}">
+                <a16:creationId xmlns:a16="http://schemas.microsoft.com/office/drawing/2014/main" id="{90BF4C24-79E7-B909-2D48-F842675B41E8}"/>
+              </a:ext>
+            </a:extLst>
+          </p:cNvPr>
+          <p:cNvPicPr>
+            <a:picLocks noChangeAspect="1"/>
+          </p:cNvPicPr>
+          <p:nvPr/>
+        </p:nvPicPr>
+        <p:blipFill>
+          <a:blip r:embed="rId5"/>
+          <a:stretch>
+            <a:fillRect/>
+          </a:stretch>
+        </p:blipFill>
+        <p:spPr>
+          <a:xfrm>
+            <a:off x="6211841" y="5209731"/>
+            <a:ext cx="3846564" cy="1231906"/>
+          </a:xfrm>
+          <a:prstGeom prst="rect">
+            <a:avLst/>
+          </a:prstGeom>
+          <a:ln>
+            <a:solidFill>
+              <a:schemeClr val="tx1"/>
+            </a:solidFill>
+          </a:ln>
+          <a:effectLst>
+            <a:outerShdw blurRad="50800" dist="38100" dir="8100000" algn="tr" rotWithShape="0">
+              <a:prstClr val="black">
+                <a:alpha val="40000"/>
+              </a:prstClr>
+            </a:outerShdw>
+          </a:effectLst>
+        </p:spPr>
+      </p:pic>
+      <p:sp>
+        <p:nvSpPr>
+          <p:cNvPr id="37" name="TextBox 36">
+            <a:extLst>
+              <a:ext uri="{FF2B5EF4-FFF2-40B4-BE49-F238E27FC236}">
+                <a16:creationId xmlns:a16="http://schemas.microsoft.com/office/drawing/2014/main" id="{C87012C3-282F-FEBE-C4B0-B50DEB4B2630}"/>
+              </a:ext>
+            </a:extLst>
+          </p:cNvPr>
+          <p:cNvSpPr txBox="1"/>
+          <p:nvPr/>
+        </p:nvSpPr>
+        <p:spPr>
+          <a:xfrm>
+            <a:off x="8709" y="6673334"/>
+            <a:ext cx="6096000" cy="184666"/>
+          </a:xfrm>
+          <a:prstGeom prst="rect">
+            <a:avLst/>
+          </a:prstGeom>
+          <a:noFill/>
+        </p:spPr>
+        <p:txBody>
+          <a:bodyPr wrap="square">
+            <a:spAutoFit/>
+          </a:bodyPr>
+          <a:lstStyle/>
+          <a:p>
+            <a:pPr algn="l"/>
+            <a:r>
+              <a:rPr lang="en-US" sz="600" b="0" i="0" u="none" strike="noStrike" baseline="0" dirty="0">
+                <a:latin typeface="AdvOTa2fa4214.B"/>
+              </a:rPr>
+              <a:t>Solute trapping and non-equilibrium microstructure </a:t>
+            </a:r>
+            <a:r>
+              <a:rPr lang="en-GB" sz="600" b="0" i="0" u="none" strike="noStrike" baseline="0" dirty="0">
+                <a:latin typeface="AdvOTa2fa4214.B"/>
+              </a:rPr>
+              <a:t>during rapid solidi</a:t>
+            </a:r>
+            <a:r>
+              <a:rPr lang="en-GB" sz="600" b="0" i="0" u="none" strike="noStrike" baseline="0" dirty="0">
+                <a:latin typeface="AdvOTa2fa4214.B+fb"/>
+              </a:rPr>
+              <a:t>fi</a:t>
+            </a:r>
+            <a:r>
+              <a:rPr lang="en-GB" sz="600" b="0" i="0" u="none" strike="noStrike" baseline="0" dirty="0">
+                <a:latin typeface="AdvOTa2fa4214.B"/>
+              </a:rPr>
+              <a:t>cation of additive </a:t>
+            </a:r>
+            <a:r>
+              <a:rPr lang="en-US" sz="600" b="0" i="0" u="none" strike="noStrike" baseline="0" dirty="0">
+                <a:latin typeface="AdvOTa2fa4214.B"/>
+              </a:rPr>
+              <a:t>manufacturing</a:t>
+            </a:r>
+            <a:endParaRPr lang="LID4096" sz="600" dirty="0"/>
+          </a:p>
+        </p:txBody>
+      </p:sp>
     </p:spTree>
     <p:extLst>
       <p:ext uri="{BB962C8B-B14F-4D97-AF65-F5344CB8AC3E}">

--- a/Plano_V02_iii_AM_FEG/e____Modelagem_MA_Resumo_RMG.pptx
+++ b/Plano_V02_iii_AM_FEG/e____Modelagem_MA_Resumo_RMG.pptx
@@ -12,11 +12,12 @@
     <p:sldId id="270" r:id="rId6"/>
     <p:sldId id="266" r:id="rId7"/>
     <p:sldId id="268" r:id="rId8"/>
-    <p:sldId id="265" r:id="rId9"/>
-    <p:sldId id="264" r:id="rId10"/>
-    <p:sldId id="261" r:id="rId11"/>
-    <p:sldId id="258" r:id="rId12"/>
+    <p:sldId id="264" r:id="rId9"/>
+    <p:sldId id="271" r:id="rId10"/>
+    <p:sldId id="258" r:id="rId11"/>
+    <p:sldId id="261" r:id="rId12"/>
     <p:sldId id="257" r:id="rId13"/>
+    <p:sldId id="265" r:id="rId14"/>
   </p:sldIdLst>
   <p:sldSz cx="12192000" cy="6858000"/>
   <p:notesSz cx="6858000" cy="9144000"/>
@@ -3725,177 +3726,6 @@
           <a:chExt cx="0" cy="0"/>
         </a:xfrm>
       </p:grpSpPr>
-      <p:sp>
-        <p:nvSpPr>
-          <p:cNvPr id="5" name="TextBox 4">
-            <a:extLst>
-              <a:ext uri="{FF2B5EF4-FFF2-40B4-BE49-F238E27FC236}">
-                <a16:creationId xmlns:a16="http://schemas.microsoft.com/office/drawing/2014/main" id="{5A7DF188-F017-C769-7AD1-5A6D9484570D}"/>
-              </a:ext>
-            </a:extLst>
-          </p:cNvPr>
-          <p:cNvSpPr txBox="1"/>
-          <p:nvPr/>
-        </p:nvSpPr>
-        <p:spPr>
-          <a:xfrm>
-            <a:off x="254101" y="5179900"/>
-            <a:ext cx="7733922" cy="1477328"/>
-          </a:xfrm>
-          <a:prstGeom prst="rect">
-            <a:avLst/>
-          </a:prstGeom>
-          <a:noFill/>
-        </p:spPr>
-        <p:txBody>
-          <a:bodyPr wrap="square">
-            <a:spAutoFit/>
-          </a:bodyPr>
-          <a:lstStyle/>
-          <a:p>
-            <a:r>
-              <a:rPr lang="pt-BR" dirty="0"/>
-              <a:t>Contatar:</a:t>
-            </a:r>
-          </a:p>
-          <a:p>
-            <a:endParaRPr lang="pt-BR" dirty="0"/>
-          </a:p>
-          <a:p>
-            <a:r>
-              <a:rPr lang="pt-BR" dirty="0"/>
-              <a:t>Prof. Carlos Henrique Marchi		UFPR	– CFD – Computação</a:t>
-            </a:r>
-          </a:p>
-          <a:p>
-            <a:r>
-              <a:rPr lang="pt-BR" dirty="0"/>
-              <a:t>Guilherme Ferreira Gomes		UNIFEI 	– A.M. – CFD</a:t>
-            </a:r>
-          </a:p>
-          <a:p>
-            <a:r>
-              <a:rPr lang="en-US" dirty="0"/>
-              <a:t>Diego </a:t>
-            </a:r>
-            <a:r>
-              <a:rPr lang="en-US" dirty="0" err="1"/>
-              <a:t>Raimundi</a:t>
-            </a:r>
-            <a:r>
-              <a:rPr lang="en-US" dirty="0"/>
-              <a:t> Corradi </a:t>
-            </a:r>
-            <a:r>
-              <a:rPr lang="pt-BR" dirty="0"/>
-              <a:t>(WAAM)	UFMG  	– OSCILAÇÃO MAGNÉTICA</a:t>
-            </a:r>
-            <a:endParaRPr lang="LID4096" dirty="0"/>
-          </a:p>
-        </p:txBody>
-      </p:sp>
-      <p:sp>
-        <p:nvSpPr>
-          <p:cNvPr id="6" name="TextBox 5">
-            <a:extLst>
-              <a:ext uri="{FF2B5EF4-FFF2-40B4-BE49-F238E27FC236}">
-                <a16:creationId xmlns:a16="http://schemas.microsoft.com/office/drawing/2014/main" id="{4210B3A0-BFB2-AA01-579D-FC29D1EA9A68}"/>
-              </a:ext>
-            </a:extLst>
-          </p:cNvPr>
-          <p:cNvSpPr txBox="1"/>
-          <p:nvPr/>
-        </p:nvSpPr>
-        <p:spPr>
-          <a:xfrm>
-            <a:off x="1473302" y="2227694"/>
-            <a:ext cx="7733922" cy="646331"/>
-          </a:xfrm>
-          <a:prstGeom prst="rect">
-            <a:avLst/>
-          </a:prstGeom>
-          <a:noFill/>
-        </p:spPr>
-        <p:txBody>
-          <a:bodyPr wrap="square">
-            <a:spAutoFit/>
-          </a:bodyPr>
-          <a:lstStyle/>
-          <a:p>
-            <a:r>
-              <a:rPr lang="pt-BR" dirty="0"/>
-              <a:t>MODELO:</a:t>
-            </a:r>
-          </a:p>
-          <a:p>
-            <a:r>
-              <a:rPr lang="pt-BR" dirty="0"/>
-              <a:t>Fonte (externa) de calor x Material - Condução, convecção, radiação</a:t>
-            </a:r>
-            <a:endParaRPr lang="LID4096" dirty="0"/>
-          </a:p>
-        </p:txBody>
-      </p:sp>
-    </p:spTree>
-    <p:extLst>
-      <p:ext uri="{BB962C8B-B14F-4D97-AF65-F5344CB8AC3E}">
-        <p14:creationId xmlns:p14="http://schemas.microsoft.com/office/powerpoint/2010/main" val="898604659"/>
-      </p:ext>
-    </p:extLst>
-  </p:cSld>
-  <p:clrMapOvr>
-    <a:masterClrMapping/>
-  </p:clrMapOvr>
-</p:sld>
-</file>
-
-<file path=ppt/slides/slide11.xml><?xml version="1.0" encoding="utf-8"?>
-<p:sld xmlns:a="http://schemas.openxmlformats.org/drawingml/2006/main" xmlns:r="http://schemas.openxmlformats.org/officeDocument/2006/relationships" xmlns:p="http://schemas.openxmlformats.org/presentationml/2006/main">
-  <p:cSld>
-    <p:spTree>
-      <p:nvGrpSpPr>
-        <p:cNvPr id="1" name=""/>
-        <p:cNvGrpSpPr/>
-        <p:nvPr/>
-      </p:nvGrpSpPr>
-      <p:grpSpPr>
-        <a:xfrm>
-          <a:off x="0" y="0"/>
-          <a:ext cx="0" cy="0"/>
-          <a:chOff x="0" y="0"/>
-          <a:chExt cx="0" cy="0"/>
-        </a:xfrm>
-      </p:grpSpPr>
-      <p:pic>
-        <p:nvPicPr>
-          <p:cNvPr id="35" name="Picture 34">
-            <a:extLst>
-              <a:ext uri="{FF2B5EF4-FFF2-40B4-BE49-F238E27FC236}">
-                <a16:creationId xmlns:a16="http://schemas.microsoft.com/office/drawing/2014/main" id="{C67BFDFB-E4FE-7C3D-65ED-F5647DF4BE4B}"/>
-              </a:ext>
-            </a:extLst>
-          </p:cNvPr>
-          <p:cNvPicPr>
-            <a:picLocks noChangeAspect="1"/>
-          </p:cNvPicPr>
-          <p:nvPr/>
-        </p:nvPicPr>
-        <p:blipFill>
-          <a:blip r:embed="rId2"/>
-          <a:stretch>
-            <a:fillRect/>
-          </a:stretch>
-        </p:blipFill>
-        <p:spPr>
-          <a:xfrm>
-            <a:off x="199480" y="333784"/>
-            <a:ext cx="4598943" cy="3602288"/>
-          </a:xfrm>
-          <a:prstGeom prst="rect">
-            <a:avLst/>
-          </a:prstGeom>
-        </p:spPr>
-      </p:pic>
       <p:grpSp>
         <p:nvGrpSpPr>
           <p:cNvPr id="22" name="Group 21">
@@ -3931,7 +3761,7 @@
             <p:nvPr/>
           </p:nvPicPr>
           <p:blipFill>
-            <a:blip r:embed="rId3"/>
+            <a:blip r:embed="rId2"/>
             <a:stretch>
               <a:fillRect/>
             </a:stretch>
@@ -3973,7 +3803,7 @@
             <p:nvPr/>
           </p:nvPicPr>
           <p:blipFill>
-            <a:blip r:embed="rId4"/>
+            <a:blip r:embed="rId3"/>
             <a:stretch>
               <a:fillRect/>
             </a:stretch>
@@ -4418,7 +4248,7 @@
               <p:nvPr/>
             </p:nvPicPr>
             <p:blipFill>
-              <a:blip r:embed="rId5"/>
+              <a:blip r:embed="rId4"/>
               <a:srcRect l="67406" t="11705" b="67943"/>
               <a:stretch>
                 <a:fillRect/>
@@ -4461,7 +4291,7 @@
               <p:nvPr/>
             </p:nvPicPr>
             <p:blipFill>
-              <a:blip r:embed="rId5"/>
+              <a:blip r:embed="rId4"/>
               <a:srcRect l="8207" t="65732" r="57173" b="3646"/>
               <a:stretch>
                 <a:fillRect/>
@@ -4534,7 +4364,7 @@
               <p:nvPr/>
             </p:nvPicPr>
             <p:blipFill>
-              <a:blip r:embed="rId6"/>
+              <a:blip r:embed="rId5"/>
               <a:stretch>
                 <a:fillRect/>
               </a:stretch>
@@ -4576,7 +4406,7 @@
               <p:nvPr/>
             </p:nvPicPr>
             <p:blipFill>
-              <a:blip r:embed="rId7"/>
+              <a:blip r:embed="rId6"/>
               <a:srcRect b="8874"/>
               <a:stretch>
                 <a:fillRect/>
@@ -4619,7 +4449,7 @@
               <p:nvPr/>
             </p:nvPicPr>
             <p:blipFill>
-              <a:blip r:embed="rId8"/>
+              <a:blip r:embed="rId7"/>
               <a:srcRect t="5183" b="14643"/>
               <a:stretch>
                 <a:fillRect/>
@@ -4662,7 +4492,7 @@
               <p:nvPr/>
             </p:nvPicPr>
             <p:blipFill>
-              <a:blip r:embed="rId9"/>
+              <a:blip r:embed="rId8"/>
               <a:srcRect l="24901" t="62166" r="1990" b="23492"/>
               <a:stretch>
                 <a:fillRect/>
@@ -4758,7 +4588,7 @@
             <p:nvPr/>
           </p:nvPicPr>
           <p:blipFill>
-            <a:blip r:embed="rId10"/>
+            <a:blip r:embed="rId9"/>
             <a:stretch>
               <a:fillRect/>
             </a:stretch>
@@ -4789,7 +4619,7 @@
           <p:nvPr/>
         </p:nvPicPr>
         <p:blipFill>
-          <a:blip r:embed="rId11"/>
+          <a:blip r:embed="rId10"/>
           <a:stretch>
             <a:fillRect/>
           </a:stretch>
@@ -4819,7 +4649,7 @@
           <p:nvPr/>
         </p:nvPicPr>
         <p:blipFill>
-          <a:blip r:embed="rId12"/>
+          <a:blip r:embed="rId11"/>
           <a:stretch>
             <a:fillRect/>
           </a:stretch>
@@ -4888,12 +4718,42 @@
           </a:p>
         </p:txBody>
       </p:sp>
+    </p:spTree>
+    <p:extLst>
+      <p:ext uri="{BB962C8B-B14F-4D97-AF65-F5344CB8AC3E}">
+        <p14:creationId xmlns:p14="http://schemas.microsoft.com/office/powerpoint/2010/main" val="3453376997"/>
+      </p:ext>
+    </p:extLst>
+  </p:cSld>
+  <p:clrMapOvr>
+    <a:masterClrMapping/>
+  </p:clrMapOvr>
+</p:sld>
+</file>
+
+<file path=ppt/slides/slide11.xml><?xml version="1.0" encoding="utf-8"?>
+<p:sld xmlns:a="http://schemas.openxmlformats.org/drawingml/2006/main" xmlns:r="http://schemas.openxmlformats.org/officeDocument/2006/relationships" xmlns:p="http://schemas.openxmlformats.org/presentationml/2006/main">
+  <p:cSld>
+    <p:spTree>
+      <p:nvGrpSpPr>
+        <p:cNvPr id="1" name=""/>
+        <p:cNvGrpSpPr/>
+        <p:nvPr/>
+      </p:nvGrpSpPr>
+      <p:grpSpPr>
+        <a:xfrm>
+          <a:off x="0" y="0"/>
+          <a:ext cx="0" cy="0"/>
+          <a:chOff x="0" y="0"/>
+          <a:chExt cx="0" cy="0"/>
+        </a:xfrm>
+      </p:grpSpPr>
       <p:sp>
         <p:nvSpPr>
-          <p:cNvPr id="3" name="TextBox 2">
-            <a:extLst>
-              <a:ext uri="{FF2B5EF4-FFF2-40B4-BE49-F238E27FC236}">
-                <a16:creationId xmlns:a16="http://schemas.microsoft.com/office/drawing/2014/main" id="{B011AAB3-B5AB-5D3D-DB2C-556F79E7A69D}"/>
+          <p:cNvPr id="5" name="TextBox 4">
+            <a:extLst>
+              <a:ext uri="{FF2B5EF4-FFF2-40B4-BE49-F238E27FC236}">
+                <a16:creationId xmlns:a16="http://schemas.microsoft.com/office/drawing/2014/main" id="{5A7DF188-F017-C769-7AD1-5A6D9484570D}"/>
               </a:ext>
             </a:extLst>
           </p:cNvPr>
@@ -4902,8 +4762,8 @@
         </p:nvSpPr>
         <p:spPr>
           <a:xfrm>
-            <a:off x="1733550" y="1145127"/>
-            <a:ext cx="1771911" cy="338554"/>
+            <a:off x="254101" y="5179900"/>
+            <a:ext cx="7733922" cy="1477328"/>
           </a:xfrm>
           <a:prstGeom prst="rect">
             <a:avLst/>
@@ -4911,38 +4771,200 @@
           <a:noFill/>
         </p:spPr>
         <p:txBody>
-          <a:bodyPr wrap="square" rtlCol="0">
+          <a:bodyPr wrap="square">
             <a:spAutoFit/>
           </a:bodyPr>
-          <a:lstStyle>
-            <a:defPPr>
-              <a:defRPr lang="LID4096"/>
-            </a:defPPr>
-            <a:lvl1pPr>
-              <a:defRPr sz="1050" b="1">
-                <a:solidFill>
-                  <a:srgbClr val="0000FF"/>
-                </a:solidFill>
-              </a:defRPr>
-            </a:lvl1pPr>
-          </a:lstStyle>
-          <a:p>
-            <a:r>
-              <a:rPr lang="en-GB" sz="1600" noProof="0" dirty="0"/>
-              <a:t>FVM</a:t>
-            </a:r>
-            <a:endParaRPr lang="en-GB" sz="2400" noProof="0" dirty="0">
-              <a:solidFill>
-                <a:srgbClr val="FF0000"/>
-              </a:solidFill>
-            </a:endParaRPr>
+          <a:lstStyle/>
+          <a:p>
+            <a:r>
+              <a:rPr lang="pt-BR" dirty="0"/>
+              <a:t>Contatar:</a:t>
+            </a:r>
+          </a:p>
+          <a:p>
+            <a:endParaRPr lang="pt-BR" dirty="0"/>
+          </a:p>
+          <a:p>
+            <a:r>
+              <a:rPr lang="pt-BR" dirty="0"/>
+              <a:t>Prof. Carlos Henrique Marchi		UFPR	– CFD – Computação</a:t>
+            </a:r>
+          </a:p>
+          <a:p>
+            <a:r>
+              <a:rPr lang="pt-BR" dirty="0"/>
+              <a:t>Guilherme Ferreira Gomes		UNIFEI 	– A.M. – CFD</a:t>
+            </a:r>
+          </a:p>
+          <a:p>
+            <a:r>
+              <a:rPr lang="en-US" dirty="0"/>
+              <a:t>Diego </a:t>
+            </a:r>
+            <a:r>
+              <a:rPr lang="en-US" dirty="0" err="1"/>
+              <a:t>Raimundi</a:t>
+            </a:r>
+            <a:r>
+              <a:rPr lang="en-US" dirty="0"/>
+              <a:t> Corradi </a:t>
+            </a:r>
+            <a:r>
+              <a:rPr lang="pt-BR" dirty="0"/>
+              <a:t>(WAAM)	UFMG  	– OSCILAÇÃO MAGNÉTICA</a:t>
+            </a:r>
+            <a:endParaRPr lang="LID4096" dirty="0"/>
           </a:p>
         </p:txBody>
       </p:sp>
+      <p:sp>
+        <p:nvSpPr>
+          <p:cNvPr id="6" name="TextBox 5">
+            <a:extLst>
+              <a:ext uri="{FF2B5EF4-FFF2-40B4-BE49-F238E27FC236}">
+                <a16:creationId xmlns:a16="http://schemas.microsoft.com/office/drawing/2014/main" id="{4210B3A0-BFB2-AA01-579D-FC29D1EA9A68}"/>
+              </a:ext>
+            </a:extLst>
+          </p:cNvPr>
+          <p:cNvSpPr txBox="1"/>
+          <p:nvPr/>
+        </p:nvSpPr>
+        <p:spPr>
+          <a:xfrm>
+            <a:off x="1473302" y="2227694"/>
+            <a:ext cx="7733922" cy="646331"/>
+          </a:xfrm>
+          <a:prstGeom prst="rect">
+            <a:avLst/>
+          </a:prstGeom>
+          <a:noFill/>
+        </p:spPr>
+        <p:txBody>
+          <a:bodyPr wrap="square">
+            <a:spAutoFit/>
+          </a:bodyPr>
+          <a:lstStyle/>
+          <a:p>
+            <a:r>
+              <a:rPr lang="pt-BR" dirty="0"/>
+              <a:t>MODELO:</a:t>
+            </a:r>
+          </a:p>
+          <a:p>
+            <a:r>
+              <a:rPr lang="pt-BR" dirty="0"/>
+              <a:t>Fonte (externa) de calor x Material - Condução, convecção, radiação</a:t>
+            </a:r>
+            <a:endParaRPr lang="LID4096" dirty="0"/>
+          </a:p>
+        </p:txBody>
+      </p:sp>
+      <p:grpSp>
+        <p:nvGrpSpPr>
+          <p:cNvPr id="25" name="Group 24">
+            <a:extLst>
+              <a:ext uri="{FF2B5EF4-FFF2-40B4-BE49-F238E27FC236}">
+                <a16:creationId xmlns:a16="http://schemas.microsoft.com/office/drawing/2014/main" id="{0A9585D2-D4E1-83FD-62F8-A5A9F54980A6}"/>
+              </a:ext>
+            </a:extLst>
+          </p:cNvPr>
+          <p:cNvGrpSpPr/>
+          <p:nvPr/>
+        </p:nvGrpSpPr>
+        <p:grpSpPr>
+          <a:xfrm>
+            <a:off x="199480" y="333784"/>
+            <a:ext cx="3305981" cy="1708802"/>
+            <a:chOff x="199480" y="333784"/>
+            <a:chExt cx="3305981" cy="1708802"/>
+          </a:xfrm>
+        </p:grpSpPr>
+        <p:pic>
+          <p:nvPicPr>
+            <p:cNvPr id="35" name="Picture 34">
+              <a:extLst>
+                <a:ext uri="{FF2B5EF4-FFF2-40B4-BE49-F238E27FC236}">
+                  <a16:creationId xmlns:a16="http://schemas.microsoft.com/office/drawing/2014/main" id="{C67BFDFB-E4FE-7C3D-65ED-F5647DF4BE4B}"/>
+                </a:ext>
+              </a:extLst>
+            </p:cNvPr>
+            <p:cNvPicPr>
+              <a:picLocks noChangeAspect="1"/>
+            </p:cNvPicPr>
+            <p:nvPr/>
+          </p:nvPicPr>
+          <p:blipFill>
+            <a:blip r:embed="rId2"/>
+            <a:stretch>
+              <a:fillRect/>
+            </a:stretch>
+          </p:blipFill>
+          <p:spPr>
+            <a:xfrm>
+              <a:off x="199480" y="333784"/>
+              <a:ext cx="2181581" cy="1708802"/>
+            </a:xfrm>
+            <a:prstGeom prst="rect">
+              <a:avLst/>
+            </a:prstGeom>
+          </p:spPr>
+        </p:pic>
+        <p:sp>
+          <p:nvSpPr>
+            <p:cNvPr id="3" name="TextBox 2">
+              <a:extLst>
+                <a:ext uri="{FF2B5EF4-FFF2-40B4-BE49-F238E27FC236}">
+                  <a16:creationId xmlns:a16="http://schemas.microsoft.com/office/drawing/2014/main" id="{B011AAB3-B5AB-5D3D-DB2C-556F79E7A69D}"/>
+                </a:ext>
+              </a:extLst>
+            </p:cNvPr>
+            <p:cNvSpPr txBox="1"/>
+            <p:nvPr/>
+          </p:nvSpPr>
+          <p:spPr>
+            <a:xfrm>
+              <a:off x="1733550" y="1145127"/>
+              <a:ext cx="1771911" cy="338554"/>
+            </a:xfrm>
+            <a:prstGeom prst="rect">
+              <a:avLst/>
+            </a:prstGeom>
+            <a:noFill/>
+          </p:spPr>
+          <p:txBody>
+            <a:bodyPr wrap="square" rtlCol="0">
+              <a:spAutoFit/>
+            </a:bodyPr>
+            <a:lstStyle>
+              <a:defPPr>
+                <a:defRPr lang="LID4096"/>
+              </a:defPPr>
+              <a:lvl1pPr>
+                <a:defRPr sz="1050" b="1">
+                  <a:solidFill>
+                    <a:srgbClr val="0000FF"/>
+                  </a:solidFill>
+                </a:defRPr>
+              </a:lvl1pPr>
+            </a:lstStyle>
+            <a:p>
+              <a:r>
+                <a:rPr lang="en-GB" sz="1600" noProof="0" dirty="0"/>
+                <a:t>FVM</a:t>
+              </a:r>
+              <a:endParaRPr lang="en-GB" sz="2400" noProof="0" dirty="0">
+                <a:solidFill>
+                  <a:srgbClr val="FF0000"/>
+                </a:solidFill>
+              </a:endParaRPr>
+            </a:p>
+          </p:txBody>
+        </p:sp>
+      </p:grpSp>
     </p:spTree>
     <p:extLst>
       <p:ext uri="{BB962C8B-B14F-4D97-AF65-F5344CB8AC3E}">
-        <p14:creationId xmlns:p14="http://schemas.microsoft.com/office/powerpoint/2010/main" val="3453376997"/>
+        <p14:creationId xmlns:p14="http://schemas.microsoft.com/office/powerpoint/2010/main" val="898604659"/>
       </p:ext>
     </p:extLst>
   </p:cSld>
@@ -4983,8 +5005,8 @@
         </p:nvGrpSpPr>
         <p:grpSpPr>
           <a:xfrm>
-            <a:off x="607054" y="495112"/>
-            <a:ext cx="10925552" cy="6129542"/>
+            <a:off x="191589" y="156754"/>
+            <a:ext cx="11695611" cy="6467900"/>
             <a:chOff x="607054" y="495112"/>
             <a:chExt cx="10925552" cy="6129542"/>
           </a:xfrm>
@@ -5893,8 +5915,8 @@
         </p:nvSpPr>
         <p:spPr>
           <a:xfrm>
-            <a:off x="9887162" y="28291"/>
-            <a:ext cx="2304838" cy="369332"/>
+            <a:off x="9888371" y="6690465"/>
+            <a:ext cx="2304838" cy="161583"/>
           </a:xfrm>
           <a:prstGeom prst="rect">
             <a:avLst/>
@@ -5902,7 +5924,7 @@
           <a:noFill/>
         </p:spPr>
         <p:txBody>
-          <a:bodyPr wrap="square">
+          <a:bodyPr wrap="square" lIns="0" tIns="0" rIns="0" bIns="0" anchor="b" anchorCtr="0">
             <a:spAutoFit/>
           </a:bodyPr>
           <a:lstStyle>
@@ -5921,7 +5943,7 @@
           </a:lstStyle>
           <a:p>
             <a:r>
-              <a:rPr lang="LID4096" sz="1800" dirty="0"/>
+              <a:rPr lang="LID4096" sz="1050" dirty="0"/>
               <a:t>AM PravaH®</a:t>
             </a:r>
           </a:p>
@@ -5931,6 +5953,192 @@
     <p:extLst>
       <p:ext uri="{BB962C8B-B14F-4D97-AF65-F5344CB8AC3E}">
         <p14:creationId xmlns:p14="http://schemas.microsoft.com/office/powerpoint/2010/main" val="1172744263"/>
+      </p:ext>
+    </p:extLst>
+  </p:cSld>
+  <p:clrMapOvr>
+    <a:masterClrMapping/>
+  </p:clrMapOvr>
+</p:sld>
+</file>
+
+<file path=ppt/slides/slide13.xml><?xml version="1.0" encoding="utf-8"?>
+<p:sld xmlns:a="http://schemas.openxmlformats.org/drawingml/2006/main" xmlns:r="http://schemas.openxmlformats.org/officeDocument/2006/relationships" xmlns:p="http://schemas.openxmlformats.org/presentationml/2006/main">
+  <p:cSld>
+    <p:spTree>
+      <p:nvGrpSpPr>
+        <p:cNvPr id="1" name=""/>
+        <p:cNvGrpSpPr/>
+        <p:nvPr/>
+      </p:nvGrpSpPr>
+      <p:grpSpPr>
+        <a:xfrm>
+          <a:off x="0" y="0"/>
+          <a:ext cx="0" cy="0"/>
+          <a:chOff x="0" y="0"/>
+          <a:chExt cx="0" cy="0"/>
+        </a:xfrm>
+      </p:grpSpPr>
+      <p:pic>
+        <p:nvPicPr>
+          <p:cNvPr id="4" name="Picture 3">
+            <a:extLst>
+              <a:ext uri="{FF2B5EF4-FFF2-40B4-BE49-F238E27FC236}">
+                <a16:creationId xmlns:a16="http://schemas.microsoft.com/office/drawing/2014/main" id="{A89B5CFE-A429-A8E9-E961-AA1723B8FA8E}"/>
+              </a:ext>
+            </a:extLst>
+          </p:cNvPr>
+          <p:cNvPicPr>
+            <a:picLocks noChangeAspect="1"/>
+          </p:cNvPicPr>
+          <p:nvPr/>
+        </p:nvPicPr>
+        <p:blipFill>
+          <a:blip r:embed="rId2"/>
+          <a:srcRect l="16866" t="51938" r="20133" b="2447"/>
+          <a:stretch>
+            <a:fillRect/>
+          </a:stretch>
+        </p:blipFill>
+        <p:spPr>
+          <a:xfrm>
+            <a:off x="235390" y="199177"/>
+            <a:ext cx="5432079" cy="2596082"/>
+          </a:xfrm>
+          <a:prstGeom prst="rect">
+            <a:avLst/>
+          </a:prstGeom>
+          <a:ln>
+            <a:solidFill>
+              <a:schemeClr val="tx1"/>
+            </a:solidFill>
+          </a:ln>
+          <a:effectLst>
+            <a:outerShdw blurRad="50800" dist="38100" dir="8100000" algn="tr" rotWithShape="0">
+              <a:prstClr val="black">
+                <a:alpha val="40000"/>
+              </a:prstClr>
+            </a:outerShdw>
+          </a:effectLst>
+        </p:spPr>
+      </p:pic>
+      <p:pic>
+        <p:nvPicPr>
+          <p:cNvPr id="5" name="Picture 4">
+            <a:extLst>
+              <a:ext uri="{FF2B5EF4-FFF2-40B4-BE49-F238E27FC236}">
+                <a16:creationId xmlns:a16="http://schemas.microsoft.com/office/drawing/2014/main" id="{4CB06E78-E635-0AE0-00E0-BED4328EBC39}"/>
+              </a:ext>
+            </a:extLst>
+          </p:cNvPr>
+          <p:cNvPicPr>
+            <a:picLocks noChangeAspect="1"/>
+          </p:cNvPicPr>
+          <p:nvPr/>
+        </p:nvPicPr>
+        <p:blipFill>
+          <a:blip r:embed="rId3"/>
+          <a:srcRect l="1695" t="5552" r="1319" b="14870"/>
+          <a:stretch>
+            <a:fillRect/>
+          </a:stretch>
+        </p:blipFill>
+        <p:spPr>
+          <a:xfrm>
+            <a:off x="3548959" y="2717259"/>
+            <a:ext cx="8407652" cy="3880455"/>
+          </a:xfrm>
+          <a:prstGeom prst="rect">
+            <a:avLst/>
+          </a:prstGeom>
+          <a:ln>
+            <a:solidFill>
+              <a:schemeClr val="tx1"/>
+            </a:solidFill>
+          </a:ln>
+          <a:effectLst>
+            <a:outerShdw blurRad="50800" dist="38100" dir="8100000" algn="tr" rotWithShape="0">
+              <a:prstClr val="black">
+                <a:alpha val="40000"/>
+              </a:prstClr>
+            </a:outerShdw>
+          </a:effectLst>
+        </p:spPr>
+      </p:pic>
+      <p:sp>
+        <p:nvSpPr>
+          <p:cNvPr id="6" name="TextBox 5">
+            <a:extLst>
+              <a:ext uri="{FF2B5EF4-FFF2-40B4-BE49-F238E27FC236}">
+                <a16:creationId xmlns:a16="http://schemas.microsoft.com/office/drawing/2014/main" id="{074F73C1-A697-9027-7856-54AEADFDE094}"/>
+              </a:ext>
+            </a:extLst>
+          </p:cNvPr>
+          <p:cNvSpPr txBox="1"/>
+          <p:nvPr/>
+        </p:nvSpPr>
+        <p:spPr>
+          <a:xfrm>
+            <a:off x="5963462" y="133781"/>
+            <a:ext cx="2943995" cy="1015663"/>
+          </a:xfrm>
+          <a:prstGeom prst="rect">
+            <a:avLst/>
+          </a:prstGeom>
+          <a:noFill/>
+        </p:spPr>
+        <p:txBody>
+          <a:bodyPr wrap="square">
+            <a:spAutoFit/>
+          </a:bodyPr>
+          <a:lstStyle/>
+          <a:p>
+            <a:r>
+              <a:rPr lang="en-GB" sz="2400" b="1" i="0" u="sng" strike="noStrike" baseline="0" dirty="0">
+                <a:solidFill>
+                  <a:srgbClr val="FF0000"/>
+                </a:solidFill>
+                <a:latin typeface="Times New Roman" panose="02020603050405020304" pitchFamily="18" charset="0"/>
+              </a:rPr>
+              <a:t>Meso-scale</a:t>
+            </a:r>
+            <a:r>
+              <a:rPr lang="en-GB" sz="1800" b="1" i="0" u="sng" strike="noStrike" baseline="0" dirty="0">
+                <a:solidFill>
+                  <a:srgbClr val="000000"/>
+                </a:solidFill>
+                <a:latin typeface="Times New Roman" panose="02020603050405020304" pitchFamily="18" charset="0"/>
+              </a:rPr>
+              <a:t> models</a:t>
+            </a:r>
+            <a:r>
+              <a:rPr lang="en-GB" sz="1800" b="0" i="0" u="none" strike="noStrike" baseline="0" dirty="0">
+                <a:solidFill>
+                  <a:srgbClr val="000000"/>
+                </a:solidFill>
+                <a:latin typeface="Times New Roman" panose="02020603050405020304" pitchFamily="18" charset="0"/>
+              </a:rPr>
+              <a:t> </a:t>
+            </a:r>
+          </a:p>
+          <a:p>
+            <a:r>
+              <a:rPr lang="en-GB" sz="1800" b="0" i="0" u="none" strike="noStrike" baseline="0" dirty="0">
+                <a:solidFill>
+                  <a:srgbClr val="000000"/>
+                </a:solidFill>
+                <a:latin typeface="Times New Roman" panose="02020603050405020304" pitchFamily="18" charset="0"/>
+              </a:rPr>
+              <a:t>pool geometry, bead formation, and dilution. </a:t>
+            </a:r>
+            <a:endParaRPr lang="LID4096" dirty="0"/>
+          </a:p>
+        </p:txBody>
+      </p:sp>
+    </p:spTree>
+    <p:extLst>
+      <p:ext uri="{BB962C8B-B14F-4D97-AF65-F5344CB8AC3E}">
+        <p14:creationId xmlns:p14="http://schemas.microsoft.com/office/powerpoint/2010/main" val="1754687154"/>
       </p:ext>
     </p:extLst>
   </p:cSld>
@@ -6170,7 +6378,7 @@
         <p:spPr>
           <a:xfrm>
             <a:off x="6318647" y="4522849"/>
-            <a:ext cx="2454161" cy="1077218"/>
+            <a:ext cx="2454161" cy="1631216"/>
           </a:xfrm>
           <a:prstGeom prst="rect">
             <a:avLst/>
@@ -6203,6 +6411,17 @@
               </a:rPr>
               <a:t>WAAM</a:t>
             </a:r>
+          </a:p>
+          <a:p>
+            <a:pPr algn="ctr"/>
+            <a:r>
+              <a:rPr lang="en-GB" sz="3600" b="1" dirty="0">
+                <a:solidFill>
+                  <a:srgbClr val="0000FF"/>
+                </a:solidFill>
+              </a:rPr>
+              <a:t>Wire DED</a:t>
+            </a:r>
             <a:endParaRPr lang="en-GB" sz="3600" dirty="0">
               <a:solidFill>
                 <a:srgbClr val="0000FF"/>
@@ -6225,8 +6444,8 @@
         </p:nvSpPr>
         <p:spPr>
           <a:xfrm>
-            <a:off x="6737573" y="5597910"/>
-            <a:ext cx="1616307" cy="830997"/>
+            <a:off x="6486810" y="6093611"/>
+            <a:ext cx="2117834" cy="461665"/>
           </a:xfrm>
           <a:prstGeom prst="rect">
             <a:avLst/>
@@ -6730,37 +6949,6 @@
           <a:chExt cx="0" cy="0"/>
         </a:xfrm>
       </p:grpSpPr>
-      <p:pic>
-        <p:nvPicPr>
-          <p:cNvPr id="2" name="Picture 1">
-            <a:extLst>
-              <a:ext uri="{FF2B5EF4-FFF2-40B4-BE49-F238E27FC236}">
-                <a16:creationId xmlns:a16="http://schemas.microsoft.com/office/drawing/2014/main" id="{A89B5CFE-A429-A8E9-E961-AA1723B8FA8E}"/>
-              </a:ext>
-            </a:extLst>
-          </p:cNvPr>
-          <p:cNvPicPr>
-            <a:picLocks noChangeAspect="1"/>
-          </p:cNvPicPr>
-          <p:nvPr/>
-        </p:nvPicPr>
-        <p:blipFill>
-          <a:blip r:embed="rId2"/>
-          <a:srcRect l="14301" t="51086" r="17403"/>
-          <a:stretch>
-            <a:fillRect/>
-          </a:stretch>
-        </p:blipFill>
-        <p:spPr>
-          <a:xfrm>
-            <a:off x="322120" y="784402"/>
-            <a:ext cx="7346165" cy="3472872"/>
-          </a:xfrm>
-          <a:prstGeom prst="rect">
-            <a:avLst/>
-          </a:prstGeom>
-        </p:spPr>
-      </p:pic>
       <p:sp>
         <p:nvSpPr>
           <p:cNvPr id="28" name="TextBox 27">
@@ -10175,7 +10363,7 @@
         </p:nvSpPr>
         <p:spPr>
           <a:xfrm>
-            <a:off x="326574" y="1742881"/>
+            <a:off x="326574" y="1829970"/>
             <a:ext cx="5664926" cy="1015663"/>
           </a:xfrm>
           <a:prstGeom prst="rect">
@@ -10282,7 +10470,7 @@
         </p:nvSpPr>
         <p:spPr>
           <a:xfrm>
-            <a:off x="2950026" y="5118198"/>
+            <a:off x="2832333" y="5163464"/>
             <a:ext cx="3154683" cy="1323439"/>
           </a:xfrm>
           <a:prstGeom prst="rect">
@@ -10296,6 +10484,7 @@
           </a:bodyPr>
           <a:lstStyle/>
           <a:p>
+            <a:pPr algn="ctr"/>
             <a:r>
               <a:rPr lang="LID4096" sz="2000" dirty="0">
                 <a:solidFill>
@@ -10318,15 +10507,23 @@
                   <a:srgbClr val="0000FF"/>
                 </a:solidFill>
               </a:rPr>
-              <a:t>flow velocity, solute concentration, and microstructure are</a:t>
-            </a:r>
+              <a:t>flow velocity, solute concentration, and microstructure </a:t>
+            </a:r>
+            <a:endParaRPr lang="pt-BR" sz="2000" dirty="0">
+              <a:solidFill>
+                <a:srgbClr val="0000FF"/>
+              </a:solidFill>
+            </a:endParaRPr>
+          </a:p>
+          <a:p>
+            <a:pPr algn="ctr"/>
             <a:r>
               <a:rPr lang="pt-BR" sz="2000" dirty="0">
                 <a:solidFill>
                   <a:srgbClr val="0000FF"/>
                 </a:solidFill>
               </a:rPr>
-              <a:t> </a:t>
+              <a:t>... d</a:t>
             </a:r>
             <a:r>
               <a:rPr lang="LID4096" sz="2000" dirty="0">
@@ -10334,7 +10531,7 @@
                   <a:srgbClr val="0000FF"/>
                 </a:solidFill>
               </a:rPr>
-              <a:t>directly coupled with each other</a:t>
+              <a:t>irectly coupled</a:t>
             </a:r>
           </a:p>
         </p:txBody>
@@ -10577,8 +10774,8 @@
         </p:blipFill>
         <p:spPr>
           <a:xfrm>
-            <a:off x="2910840" y="3019053"/>
-            <a:ext cx="2524503" cy="1791368"/>
+            <a:off x="2910840" y="3019052"/>
+            <a:ext cx="2930850" cy="2079709"/>
           </a:xfrm>
           <a:prstGeom prst="rect">
             <a:avLst/>
@@ -10681,9 +10878,6 @@
           <a:p>
             <a:r>
               <a:rPr lang="en-GB" sz="2400" b="1" dirty="0">
-                <a:solidFill>
-                  <a:srgbClr val="FF0000"/>
-                </a:solidFill>
                 <a:effectLst>
                   <a:outerShdw blurRad="38100" dist="38100" dir="2700000" algn="tl">
                     <a:srgbClr val="000000">
@@ -10695,9 +10889,6 @@
               <a:t>A.M (3D)</a:t>
             </a:r>
             <a:endParaRPr lang="en-GB" sz="2400" b="1" noProof="0" dirty="0">
-              <a:solidFill>
-                <a:srgbClr val="FF0000"/>
-              </a:solidFill>
               <a:effectLst>
                 <a:outerShdw blurRad="38100" dist="38100" dir="2700000" algn="tl">
                   <a:srgbClr val="000000">
@@ -10723,7 +10914,7 @@
         </p:nvSpPr>
         <p:spPr>
           <a:xfrm>
-            <a:off x="10058405" y="2136078"/>
+            <a:off x="10058405" y="2090813"/>
             <a:ext cx="1495703" cy="461665"/>
           </a:xfrm>
           <a:prstGeom prst="rect">
@@ -10750,9 +10941,6 @@
           <a:p>
             <a:r>
               <a:rPr lang="en-GB" sz="2400" b="1" dirty="0">
-                <a:solidFill>
-                  <a:srgbClr val="FF0000"/>
-                </a:solidFill>
                 <a:effectLst>
                   <a:outerShdw blurRad="38100" dist="38100" dir="2700000" algn="tl">
                     <a:srgbClr val="000000">
@@ -10764,9 +10952,6 @@
               <a:t>Modelo</a:t>
             </a:r>
             <a:endParaRPr lang="en-GB" sz="2400" b="1" noProof="0" dirty="0">
-              <a:solidFill>
-                <a:srgbClr val="FF0000"/>
-              </a:solidFill>
               <a:effectLst>
                 <a:outerShdw blurRad="38100" dist="38100" dir="2700000" algn="tl">
                   <a:srgbClr val="000000">
@@ -10922,6 +11107,86 @@
               <a:t>manufacturing</a:t>
             </a:r>
             <a:endParaRPr lang="LID4096" sz="600" dirty="0"/>
+          </a:p>
+        </p:txBody>
+      </p:sp>
+      <p:sp>
+        <p:nvSpPr>
+          <p:cNvPr id="4" name="Rectangle: Rounded Corners 3">
+            <a:extLst>
+              <a:ext uri="{FF2B5EF4-FFF2-40B4-BE49-F238E27FC236}">
+                <a16:creationId xmlns:a16="http://schemas.microsoft.com/office/drawing/2014/main" id="{0248A28C-04CA-5432-7115-335E104ADF21}"/>
+              </a:ext>
+            </a:extLst>
+          </p:cNvPr>
+          <p:cNvSpPr/>
+          <p:nvPr/>
+        </p:nvSpPr>
+        <p:spPr>
+          <a:xfrm>
+            <a:off x="4759904" y="501803"/>
+            <a:ext cx="1559713" cy="555335"/>
+          </a:xfrm>
+          <a:prstGeom prst="roundRect">
+            <a:avLst/>
+          </a:prstGeom>
+          <a:noFill/>
+        </p:spPr>
+        <p:txBody>
+          <a:bodyPr wrap="square" lIns="0" tIns="0" rIns="0" bIns="0" anchor="ctr" anchorCtr="0">
+            <a:noAutofit/>
+          </a:bodyPr>
+          <a:lstStyle/>
+          <a:p>
+            <a:pPr algn="ctr"/>
+            <a:r>
+              <a:rPr lang="LID4096" sz="2400" b="1" u="sng" dirty="0">
+                <a:solidFill>
+                  <a:srgbClr val="0000FF"/>
+                </a:solidFill>
+                <a:effectLst>
+                  <a:outerShdw blurRad="38100" dist="38100" dir="2700000" algn="tl">
+                    <a:srgbClr val="000000">
+                      <a:alpha val="43137"/>
+                    </a:srgbClr>
+                  </a:outerShdw>
+                </a:effectLst>
+                <a:latin typeface="Horley Old Style MT"/>
+              </a:rPr>
+              <a:t>Powder</a:t>
+            </a:r>
+            <a:r>
+              <a:rPr lang="pt-BR" sz="2400" b="1" dirty="0">
+                <a:solidFill>
+                  <a:srgbClr val="0000FF"/>
+                </a:solidFill>
+                <a:effectLst>
+                  <a:outerShdw blurRad="38100" dist="38100" dir="2700000" algn="tl">
+                    <a:srgbClr val="000000">
+                      <a:alpha val="43137"/>
+                    </a:srgbClr>
+                  </a:outerShdw>
+                </a:effectLst>
+                <a:latin typeface="Horley Old Style MT"/>
+              </a:rPr>
+              <a:t> </a:t>
+            </a:r>
+            <a:r>
+              <a:rPr lang="LID4096" sz="2400" b="1" dirty="0">
+                <a:solidFill>
+                  <a:srgbClr val="0000FF"/>
+                </a:solidFill>
+                <a:effectLst>
+                  <a:outerShdw blurRad="38100" dist="38100" dir="2700000" algn="tl">
+                    <a:srgbClr val="000000">
+                      <a:alpha val="43137"/>
+                    </a:srgbClr>
+                  </a:outerShdw>
+                </a:effectLst>
+                <a:latin typeface="Horley Old Style MT"/>
+              </a:rPr>
+              <a:t>Bed Fusion (PBF)</a:t>
+            </a:r>
           </a:p>
         </p:txBody>
       </p:sp>
@@ -10955,10 +11220,451 @@
           <a:chExt cx="0" cy="0"/>
         </a:xfrm>
       </p:grpSpPr>
+      <p:grpSp>
+        <p:nvGrpSpPr>
+          <p:cNvPr id="12" name="Group 11">
+            <a:extLst>
+              <a:ext uri="{FF2B5EF4-FFF2-40B4-BE49-F238E27FC236}">
+                <a16:creationId xmlns:a16="http://schemas.microsoft.com/office/drawing/2014/main" id="{E1EBB2E8-9439-BB93-A6EF-551B9FC807B7}"/>
+              </a:ext>
+            </a:extLst>
+          </p:cNvPr>
+          <p:cNvGrpSpPr>
+            <a:grpSpLocks noChangeAspect="1"/>
+          </p:cNvGrpSpPr>
+          <p:nvPr/>
+        </p:nvGrpSpPr>
+        <p:grpSpPr>
+          <a:xfrm>
+            <a:off x="380554" y="116232"/>
+            <a:ext cx="7388241" cy="3390539"/>
+            <a:chOff x="132785" y="116232"/>
+            <a:chExt cx="6926142" cy="3178477"/>
+          </a:xfrm>
+          <a:effectLst>
+            <a:outerShdw blurRad="50800" dist="50800" dir="5400000" sx="110000" sy="110000" algn="ctr" rotWithShape="0">
+              <a:srgbClr val="000000">
+                <a:alpha val="43137"/>
+              </a:srgbClr>
+            </a:outerShdw>
+          </a:effectLst>
+        </p:grpSpPr>
+        <p:pic>
+          <p:nvPicPr>
+            <p:cNvPr id="3" name="Picture 2">
+              <a:extLst>
+                <a:ext uri="{FF2B5EF4-FFF2-40B4-BE49-F238E27FC236}">
+                  <a16:creationId xmlns:a16="http://schemas.microsoft.com/office/drawing/2014/main" id="{0AAB7011-D8CA-8C95-9920-2427E29C6876}"/>
+                </a:ext>
+              </a:extLst>
+            </p:cNvPr>
+            <p:cNvPicPr>
+              <a:picLocks noChangeAspect="1"/>
+            </p:cNvPicPr>
+            <p:nvPr/>
+          </p:nvPicPr>
+          <p:blipFill>
+            <a:blip r:embed="rId2"/>
+            <a:stretch>
+              <a:fillRect/>
+            </a:stretch>
+          </p:blipFill>
+          <p:spPr>
+            <a:xfrm>
+              <a:off x="2368640" y="116232"/>
+              <a:ext cx="4690287" cy="1812156"/>
+            </a:xfrm>
+            <a:prstGeom prst="rect">
+              <a:avLst/>
+            </a:prstGeom>
+            <a:ln>
+              <a:solidFill>
+                <a:schemeClr val="tx1"/>
+              </a:solidFill>
+            </a:ln>
+            <a:effectLst>
+              <a:outerShdw blurRad="50800" dist="38100" dir="8100000" algn="tr" rotWithShape="0">
+                <a:prstClr val="black">
+                  <a:alpha val="40000"/>
+                </a:prstClr>
+              </a:outerShdw>
+            </a:effectLst>
+          </p:spPr>
+        </p:pic>
+        <p:pic>
+          <p:nvPicPr>
+            <p:cNvPr id="5" name="Picture 4">
+              <a:extLst>
+                <a:ext uri="{FF2B5EF4-FFF2-40B4-BE49-F238E27FC236}">
+                  <a16:creationId xmlns:a16="http://schemas.microsoft.com/office/drawing/2014/main" id="{B251FCD5-6DD4-8F2E-A175-A75B503BF11F}"/>
+                </a:ext>
+              </a:extLst>
+            </p:cNvPr>
+            <p:cNvPicPr>
+              <a:picLocks noChangeAspect="1"/>
+            </p:cNvPicPr>
+            <p:nvPr/>
+          </p:nvPicPr>
+          <p:blipFill>
+            <a:blip r:embed="rId3"/>
+            <a:stretch>
+              <a:fillRect/>
+            </a:stretch>
+          </p:blipFill>
+          <p:spPr>
+            <a:xfrm>
+              <a:off x="132785" y="116232"/>
+              <a:ext cx="2235855" cy="3178477"/>
+            </a:xfrm>
+            <a:prstGeom prst="rect">
+              <a:avLst/>
+            </a:prstGeom>
+            <a:ln>
+              <a:solidFill>
+                <a:schemeClr val="tx1"/>
+              </a:solidFill>
+            </a:ln>
+            <a:effectLst>
+              <a:outerShdw blurRad="50800" dist="38100" dir="8100000" algn="tr" rotWithShape="0">
+                <a:prstClr val="black">
+                  <a:alpha val="40000"/>
+                </a:prstClr>
+              </a:outerShdw>
+            </a:effectLst>
+          </p:spPr>
+        </p:pic>
+      </p:grpSp>
+      <p:pic>
+        <p:nvPicPr>
+          <p:cNvPr id="7" name="Picture 6">
+            <a:extLst>
+              <a:ext uri="{FF2B5EF4-FFF2-40B4-BE49-F238E27FC236}">
+                <a16:creationId xmlns:a16="http://schemas.microsoft.com/office/drawing/2014/main" id="{BDABE4C5-CE48-2FCC-B2AF-C39F279E1B39}"/>
+              </a:ext>
+            </a:extLst>
+          </p:cNvPr>
+          <p:cNvPicPr>
+            <a:picLocks noChangeAspect="1"/>
+          </p:cNvPicPr>
+          <p:nvPr/>
+        </p:nvPicPr>
+        <p:blipFill>
+          <a:blip r:embed="rId4"/>
+          <a:srcRect l="2242" t="2493" r="2462" b="7363"/>
+          <a:stretch>
+            <a:fillRect/>
+          </a:stretch>
+        </p:blipFill>
+        <p:spPr>
+          <a:xfrm>
+            <a:off x="3534936" y="2181885"/>
+            <a:ext cx="8524280" cy="4559883"/>
+          </a:xfrm>
+          <a:prstGeom prst="rect">
+            <a:avLst/>
+          </a:prstGeom>
+          <a:ln>
+            <a:solidFill>
+              <a:schemeClr val="tx1"/>
+            </a:solidFill>
+          </a:ln>
+          <a:effectLst>
+            <a:outerShdw blurRad="50800" dist="38100" dir="8100000" algn="tr" rotWithShape="0">
+              <a:prstClr val="black">
+                <a:alpha val="40000"/>
+              </a:prstClr>
+            </a:outerShdw>
+          </a:effectLst>
+        </p:spPr>
+      </p:pic>
+      <p:grpSp>
+        <p:nvGrpSpPr>
+          <p:cNvPr id="11" name="Group 10">
+            <a:extLst>
+              <a:ext uri="{FF2B5EF4-FFF2-40B4-BE49-F238E27FC236}">
+                <a16:creationId xmlns:a16="http://schemas.microsoft.com/office/drawing/2014/main" id="{CFD66E51-4094-5727-6754-C37B58D0D33A}"/>
+              </a:ext>
+            </a:extLst>
+          </p:cNvPr>
+          <p:cNvGrpSpPr/>
+          <p:nvPr/>
+        </p:nvGrpSpPr>
+        <p:grpSpPr>
+          <a:xfrm>
+            <a:off x="208230" y="4036934"/>
+            <a:ext cx="3209925" cy="2637511"/>
+            <a:chOff x="208230" y="4036934"/>
+            <a:chExt cx="3209925" cy="2637511"/>
+          </a:xfrm>
+        </p:grpSpPr>
+        <p:pic>
+          <p:nvPicPr>
+            <p:cNvPr id="10" name="Picture 9">
+              <a:extLst>
+                <a:ext uri="{FF2B5EF4-FFF2-40B4-BE49-F238E27FC236}">
+                  <a16:creationId xmlns:a16="http://schemas.microsoft.com/office/drawing/2014/main" id="{AED9108D-075C-D25C-4C85-D3AF9D8C1EEC}"/>
+                </a:ext>
+              </a:extLst>
+            </p:cNvPr>
+            <p:cNvPicPr>
+              <a:picLocks noChangeAspect="1"/>
+            </p:cNvPicPr>
+            <p:nvPr/>
+          </p:nvPicPr>
+          <p:blipFill>
+            <a:blip r:embed="rId5"/>
+            <a:stretch>
+              <a:fillRect/>
+            </a:stretch>
+          </p:blipFill>
+          <p:spPr>
+            <a:xfrm>
+              <a:off x="208230" y="4036934"/>
+              <a:ext cx="3209925" cy="762000"/>
+            </a:xfrm>
+            <a:prstGeom prst="rect">
+              <a:avLst/>
+            </a:prstGeom>
+            <a:ln>
+              <a:solidFill>
+                <a:schemeClr val="tx1"/>
+              </a:solidFill>
+            </a:ln>
+            <a:effectLst>
+              <a:outerShdw blurRad="50800" dist="38100" dir="8100000" algn="tr" rotWithShape="0">
+                <a:prstClr val="black">
+                  <a:alpha val="40000"/>
+                </a:prstClr>
+              </a:outerShdw>
+            </a:effectLst>
+          </p:spPr>
+        </p:pic>
+        <p:pic>
+          <p:nvPicPr>
+            <p:cNvPr id="20" name="Picture 19">
+              <a:extLst>
+                <a:ext uri="{FF2B5EF4-FFF2-40B4-BE49-F238E27FC236}">
+                  <a16:creationId xmlns:a16="http://schemas.microsoft.com/office/drawing/2014/main" id="{233E7CCF-1FCF-7E2A-834A-D4BDC8B3E7C2}"/>
+                </a:ext>
+              </a:extLst>
+            </p:cNvPr>
+            <p:cNvPicPr>
+              <a:picLocks noChangeAspect="1"/>
+            </p:cNvPicPr>
+            <p:nvPr/>
+          </p:nvPicPr>
+          <p:blipFill>
+            <a:blip r:embed="rId6"/>
+            <a:stretch>
+              <a:fillRect/>
+            </a:stretch>
+          </p:blipFill>
+          <p:spPr>
+            <a:xfrm>
+              <a:off x="208230" y="4876362"/>
+              <a:ext cx="2152650" cy="990600"/>
+            </a:xfrm>
+            <a:prstGeom prst="rect">
+              <a:avLst/>
+            </a:prstGeom>
+            <a:ln>
+              <a:solidFill>
+                <a:schemeClr val="tx1"/>
+              </a:solidFill>
+            </a:ln>
+            <a:effectLst>
+              <a:outerShdw blurRad="50800" dist="38100" dir="8100000" algn="tr" rotWithShape="0">
+                <a:prstClr val="black">
+                  <a:alpha val="40000"/>
+                </a:prstClr>
+              </a:outerShdw>
+            </a:effectLst>
+          </p:spPr>
+        </p:pic>
+        <p:pic>
+          <p:nvPicPr>
+            <p:cNvPr id="23" name="Picture 22">
+              <a:extLst>
+                <a:ext uri="{FF2B5EF4-FFF2-40B4-BE49-F238E27FC236}">
+                  <a16:creationId xmlns:a16="http://schemas.microsoft.com/office/drawing/2014/main" id="{EE6ED72A-85CE-824F-8C3F-318FC7CED511}"/>
+                </a:ext>
+              </a:extLst>
+            </p:cNvPr>
+            <p:cNvPicPr>
+              <a:picLocks noChangeAspect="1"/>
+            </p:cNvPicPr>
+            <p:nvPr/>
+          </p:nvPicPr>
+          <p:blipFill>
+            <a:blip r:embed="rId7"/>
+            <a:stretch>
+              <a:fillRect/>
+            </a:stretch>
+          </p:blipFill>
+          <p:spPr>
+            <a:xfrm>
+              <a:off x="208230" y="5941020"/>
+              <a:ext cx="2628900" cy="733425"/>
+            </a:xfrm>
+            <a:prstGeom prst="rect">
+              <a:avLst/>
+            </a:prstGeom>
+            <a:ln>
+              <a:solidFill>
+                <a:schemeClr val="tx1"/>
+              </a:solidFill>
+            </a:ln>
+            <a:effectLst>
+              <a:outerShdw blurRad="50800" dist="38100" dir="8100000" algn="tr" rotWithShape="0">
+                <a:prstClr val="black">
+                  <a:alpha val="40000"/>
+                </a:prstClr>
+              </a:outerShdw>
+            </a:effectLst>
+          </p:spPr>
+        </p:pic>
+      </p:grpSp>
+      <p:sp>
+        <p:nvSpPr>
+          <p:cNvPr id="14" name="TextBox 13">
+            <a:extLst>
+              <a:ext uri="{FF2B5EF4-FFF2-40B4-BE49-F238E27FC236}">
+                <a16:creationId xmlns:a16="http://schemas.microsoft.com/office/drawing/2014/main" id="{7776201B-C8EF-4845-8B14-13D831AB862E}"/>
+              </a:ext>
+            </a:extLst>
+          </p:cNvPr>
+          <p:cNvSpPr txBox="1"/>
+          <p:nvPr/>
+        </p:nvSpPr>
+        <p:spPr>
+          <a:xfrm>
+            <a:off x="8166655" y="253558"/>
+            <a:ext cx="3478793" cy="1661993"/>
+          </a:xfrm>
+          <a:prstGeom prst="rect">
+            <a:avLst/>
+          </a:prstGeom>
+          <a:noFill/>
+        </p:spPr>
+        <p:txBody>
+          <a:bodyPr wrap="square">
+            <a:spAutoFit/>
+          </a:bodyPr>
+          <a:lstStyle/>
+          <a:p>
+            <a:pPr algn="r"/>
+            <a:r>
+              <a:rPr lang="en-GB" sz="2400" b="1" i="0" u="sng" strike="noStrike" baseline="0" dirty="0">
+                <a:solidFill>
+                  <a:srgbClr val="131413"/>
+                </a:solidFill>
+                <a:latin typeface="LhlvjmAdvTT577c760c"/>
+              </a:rPr>
+              <a:t>An analytical solution </a:t>
+            </a:r>
+            <a:r>
+              <a:rPr lang="en-GB" sz="2000" b="0" i="0" u="none" strike="noStrike" baseline="0" dirty="0">
+                <a:solidFill>
+                  <a:srgbClr val="131413"/>
+                </a:solidFill>
+                <a:latin typeface="LhlvjmAdvTT577c760c"/>
+              </a:rPr>
+              <a:t>for temperature distribution in fillet arc welding</a:t>
+            </a:r>
+          </a:p>
+          <a:p>
+            <a:pPr algn="r"/>
+            <a:r>
+              <a:rPr lang="en-GB" sz="2000" b="0" i="0" u="none" strike="noStrike" baseline="0" dirty="0">
+                <a:solidFill>
+                  <a:srgbClr val="131413"/>
+                </a:solidFill>
+                <a:latin typeface="LhlvjmAdvTT577c760c"/>
+              </a:rPr>
+              <a:t>based on an adaptive function</a:t>
+            </a:r>
+          </a:p>
+          <a:p>
+            <a:pPr algn="r"/>
+            <a:r>
+              <a:rPr lang="en-US" dirty="0"/>
+              <a:t>Nasiri &amp; </a:t>
+            </a:r>
+            <a:r>
+              <a:rPr lang="en-US" dirty="0" err="1"/>
+              <a:t>Enzinger</a:t>
+            </a:r>
+            <a:r>
+              <a:rPr lang="en-US" dirty="0"/>
+              <a:t> - 2018</a:t>
+            </a:r>
+            <a:endParaRPr lang="LID4096" sz="2000" dirty="0"/>
+          </a:p>
+        </p:txBody>
+      </p:sp>
+      <p:sp>
+        <p:nvSpPr>
+          <p:cNvPr id="16" name="TextBox 15">
+            <a:extLst>
+              <a:ext uri="{FF2B5EF4-FFF2-40B4-BE49-F238E27FC236}">
+                <a16:creationId xmlns:a16="http://schemas.microsoft.com/office/drawing/2014/main" id="{8D6251A2-D638-571D-DCE9-8C044896874B}"/>
+              </a:ext>
+            </a:extLst>
+          </p:cNvPr>
+          <p:cNvSpPr txBox="1"/>
+          <p:nvPr/>
+        </p:nvSpPr>
+        <p:spPr>
+          <a:xfrm>
+            <a:off x="4571302" y="189798"/>
+            <a:ext cx="1391772" cy="954107"/>
+          </a:xfrm>
+          <a:prstGeom prst="rect">
+            <a:avLst/>
+          </a:prstGeom>
+          <a:noFill/>
+        </p:spPr>
+        <p:txBody>
+          <a:bodyPr wrap="square">
+            <a:spAutoFit/>
+          </a:bodyPr>
+          <a:lstStyle/>
+          <a:p>
+            <a:pPr algn="ctr"/>
+            <a:r>
+              <a:rPr lang="en-GB" sz="2800" b="1" dirty="0">
+                <a:solidFill>
+                  <a:srgbClr val="0000FF"/>
+                </a:solidFill>
+                <a:effectLst>
+                  <a:outerShdw blurRad="38100" dist="38100" dir="2700000" algn="tl">
+                    <a:srgbClr val="000000">
+                      <a:alpha val="43137"/>
+                    </a:srgbClr>
+                  </a:outerShdw>
+                </a:effectLst>
+              </a:rPr>
+              <a:t>Wire DED</a:t>
+            </a:r>
+            <a:endParaRPr lang="en-GB" sz="2800" dirty="0">
+              <a:solidFill>
+                <a:srgbClr val="0000FF"/>
+              </a:solidFill>
+              <a:effectLst>
+                <a:outerShdw blurRad="38100" dist="38100" dir="2700000" algn="tl">
+                  <a:srgbClr val="000000">
+                    <a:alpha val="43137"/>
+                  </a:srgbClr>
+                </a:outerShdw>
+              </a:effectLst>
+            </a:endParaRPr>
+          </a:p>
+        </p:txBody>
+      </p:sp>
     </p:spTree>
     <p:extLst>
       <p:ext uri="{BB962C8B-B14F-4D97-AF65-F5344CB8AC3E}">
-        <p14:creationId xmlns:p14="http://schemas.microsoft.com/office/powerpoint/2010/main" val="1754687154"/>
+        <p14:creationId xmlns:p14="http://schemas.microsoft.com/office/powerpoint/2010/main" val="2985938640"/>
       </p:ext>
     </p:extLst>
   </p:cSld>
@@ -10985,10 +11691,244 @@
           <a:chExt cx="0" cy="0"/>
         </a:xfrm>
       </p:grpSpPr>
+      <p:sp>
+        <p:nvSpPr>
+          <p:cNvPr id="8" name="Rectangle: Rounded Corners 7">
+            <a:extLst>
+              <a:ext uri="{FF2B5EF4-FFF2-40B4-BE49-F238E27FC236}">
+                <a16:creationId xmlns:a16="http://schemas.microsoft.com/office/drawing/2014/main" id="{8DD28AE1-8658-9FB3-A277-187BDA0FE874}"/>
+              </a:ext>
+            </a:extLst>
+          </p:cNvPr>
+          <p:cNvSpPr/>
+          <p:nvPr/>
+        </p:nvSpPr>
+        <p:spPr>
+          <a:xfrm>
+            <a:off x="6421922" y="201481"/>
+            <a:ext cx="5071603" cy="318411"/>
+          </a:xfrm>
+          <a:prstGeom prst="roundRect">
+            <a:avLst/>
+          </a:prstGeom>
+          <a:solidFill>
+            <a:schemeClr val="bg1"/>
+          </a:solidFill>
+        </p:spPr>
+        <p:txBody>
+          <a:bodyPr wrap="square" lIns="0" tIns="0" rIns="0" bIns="0" anchor="ctr" anchorCtr="0">
+            <a:noAutofit/>
+          </a:bodyPr>
+          <a:lstStyle/>
+          <a:p>
+            <a:r>
+              <a:rPr lang="en-US" sz="2400" b="1" dirty="0">
+                <a:solidFill>
+                  <a:srgbClr val="FF0000"/>
+                </a:solidFill>
+                <a:effectLst>
+                  <a:outerShdw blurRad="38100" dist="38100" dir="2700000" algn="tl">
+                    <a:srgbClr val="000000">
+                      <a:alpha val="43137"/>
+                    </a:srgbClr>
+                  </a:outerShdw>
+                </a:effectLst>
+                <a:latin typeface="Horley Old Style MT"/>
+              </a:rPr>
+              <a:t>Directed Energy Deposition (DED - </a:t>
+            </a:r>
+            <a:r>
+              <a:rPr lang="en-US" sz="2400" b="1" u="sng" dirty="0">
+                <a:effectLst>
+                  <a:outerShdw blurRad="38100" dist="38100" dir="2700000" algn="tl">
+                    <a:srgbClr val="000000">
+                      <a:alpha val="43137"/>
+                    </a:srgbClr>
+                  </a:outerShdw>
+                </a:effectLst>
+                <a:latin typeface="Horley Old Style MT"/>
+              </a:rPr>
+              <a:t>ARC</a:t>
+            </a:r>
+            <a:r>
+              <a:rPr lang="en-US" sz="2400" b="1" dirty="0">
+                <a:solidFill>
+                  <a:srgbClr val="FF0000"/>
+                </a:solidFill>
+                <a:effectLst>
+                  <a:outerShdw blurRad="38100" dist="38100" dir="2700000" algn="tl">
+                    <a:srgbClr val="000000">
+                      <a:alpha val="43137"/>
+                    </a:srgbClr>
+                  </a:outerShdw>
+                </a:effectLst>
+                <a:latin typeface="Horley Old Style MT"/>
+              </a:rPr>
+              <a:t>)</a:t>
+            </a:r>
+            <a:endParaRPr lang="LID4096" sz="2400" b="1" dirty="0">
+              <a:solidFill>
+                <a:srgbClr val="FF0000"/>
+              </a:solidFill>
+              <a:effectLst>
+                <a:outerShdw blurRad="38100" dist="38100" dir="2700000" algn="tl">
+                  <a:srgbClr val="000000">
+                    <a:alpha val="43137"/>
+                  </a:srgbClr>
+                </a:outerShdw>
+              </a:effectLst>
+              <a:latin typeface="Horley Old Style MT"/>
+            </a:endParaRPr>
+          </a:p>
+        </p:txBody>
+      </p:sp>
+      <p:pic>
+        <p:nvPicPr>
+          <p:cNvPr id="9" name="Picture 8">
+            <a:extLst>
+              <a:ext uri="{FF2B5EF4-FFF2-40B4-BE49-F238E27FC236}">
+                <a16:creationId xmlns:a16="http://schemas.microsoft.com/office/drawing/2014/main" id="{717B8671-692C-2B83-C5B5-A3AEFD362B56}"/>
+              </a:ext>
+            </a:extLst>
+          </p:cNvPr>
+          <p:cNvPicPr>
+            <a:picLocks noChangeAspect="1"/>
+          </p:cNvPicPr>
+          <p:nvPr/>
+        </p:nvPicPr>
+        <p:blipFill>
+          <a:blip r:embed="rId2"/>
+          <a:stretch>
+            <a:fillRect/>
+          </a:stretch>
+        </p:blipFill>
+        <p:spPr>
+          <a:xfrm>
+            <a:off x="6318647" y="703935"/>
+            <a:ext cx="5327657" cy="3530848"/>
+          </a:xfrm>
+          <a:prstGeom prst="rect">
+            <a:avLst/>
+          </a:prstGeom>
+          <a:ln>
+            <a:solidFill>
+              <a:schemeClr val="tx1"/>
+            </a:solidFill>
+          </a:ln>
+          <a:effectLst>
+            <a:outerShdw blurRad="50800" dist="38100" dir="8100000" algn="tr" rotWithShape="0">
+              <a:prstClr val="black">
+                <a:alpha val="40000"/>
+              </a:prstClr>
+            </a:outerShdw>
+          </a:effectLst>
+        </p:spPr>
+      </p:pic>
+      <p:pic>
+        <p:nvPicPr>
+          <p:cNvPr id="11" name="Picture 10">
+            <a:extLst>
+              <a:ext uri="{FF2B5EF4-FFF2-40B4-BE49-F238E27FC236}">
+                <a16:creationId xmlns:a16="http://schemas.microsoft.com/office/drawing/2014/main" id="{C7DC0F4A-BF83-1FBC-10AA-B32F537FEA9F}"/>
+              </a:ext>
+            </a:extLst>
+          </p:cNvPr>
+          <p:cNvPicPr>
+            <a:picLocks noChangeAspect="1"/>
+          </p:cNvPicPr>
+          <p:nvPr/>
+        </p:nvPicPr>
+        <p:blipFill>
+          <a:blip r:embed="rId3"/>
+          <a:stretch>
+            <a:fillRect/>
+          </a:stretch>
+        </p:blipFill>
+        <p:spPr>
+          <a:xfrm>
+            <a:off x="422982" y="703935"/>
+            <a:ext cx="5450372" cy="2016030"/>
+          </a:xfrm>
+          <a:prstGeom prst="rect">
+            <a:avLst/>
+          </a:prstGeom>
+          <a:ln>
+            <a:solidFill>
+              <a:schemeClr val="tx1"/>
+            </a:solidFill>
+          </a:ln>
+          <a:effectLst>
+            <a:outerShdw blurRad="50800" dist="38100" dir="8100000" algn="tr" rotWithShape="0">
+              <a:prstClr val="black">
+                <a:alpha val="40000"/>
+              </a:prstClr>
+            </a:outerShdw>
+          </a:effectLst>
+        </p:spPr>
+      </p:pic>
+      <p:sp>
+        <p:nvSpPr>
+          <p:cNvPr id="12" name="TextBox 11">
+            <a:extLst>
+              <a:ext uri="{FF2B5EF4-FFF2-40B4-BE49-F238E27FC236}">
+                <a16:creationId xmlns:a16="http://schemas.microsoft.com/office/drawing/2014/main" id="{2F297AC9-BEDB-F1E3-489F-0C86E947A993}"/>
+              </a:ext>
+            </a:extLst>
+          </p:cNvPr>
+          <p:cNvSpPr txBox="1"/>
+          <p:nvPr/>
+        </p:nvSpPr>
+        <p:spPr>
+          <a:xfrm>
+            <a:off x="10254532" y="703935"/>
+            <a:ext cx="1391772" cy="954107"/>
+          </a:xfrm>
+          <a:prstGeom prst="rect">
+            <a:avLst/>
+          </a:prstGeom>
+          <a:noFill/>
+        </p:spPr>
+        <p:txBody>
+          <a:bodyPr wrap="square">
+            <a:spAutoFit/>
+          </a:bodyPr>
+          <a:lstStyle/>
+          <a:p>
+            <a:pPr algn="ctr"/>
+            <a:r>
+              <a:rPr lang="en-GB" sz="2800" b="1" dirty="0">
+                <a:solidFill>
+                  <a:srgbClr val="0000FF"/>
+                </a:solidFill>
+                <a:effectLst>
+                  <a:outerShdw blurRad="38100" dist="38100" dir="2700000" algn="tl">
+                    <a:srgbClr val="000000">
+                      <a:alpha val="43137"/>
+                    </a:srgbClr>
+                  </a:outerShdw>
+                </a:effectLst>
+              </a:rPr>
+              <a:t>Wire DED</a:t>
+            </a:r>
+            <a:endParaRPr lang="en-GB" sz="2800" dirty="0">
+              <a:solidFill>
+                <a:srgbClr val="0000FF"/>
+              </a:solidFill>
+              <a:effectLst>
+                <a:outerShdw blurRad="38100" dist="38100" dir="2700000" algn="tl">
+                  <a:srgbClr val="000000">
+                    <a:alpha val="43137"/>
+                  </a:srgbClr>
+                </a:outerShdw>
+              </a:effectLst>
+            </a:endParaRPr>
+          </a:p>
+        </p:txBody>
+      </p:sp>
     </p:spTree>
     <p:extLst>
       <p:ext uri="{BB962C8B-B14F-4D97-AF65-F5344CB8AC3E}">
-        <p14:creationId xmlns:p14="http://schemas.microsoft.com/office/powerpoint/2010/main" val="2985938640"/>
+        <p14:creationId xmlns:p14="http://schemas.microsoft.com/office/powerpoint/2010/main" val="544118186"/>
       </p:ext>
     </p:extLst>
   </p:cSld>
